--- a/slides/05 - Python Operators.pptx
+++ b/slides/05 - Python Operators.pptx
@@ -43,16 +43,17 @@
     <p:sldId id="288" r:id="rId38"/>
     <p:sldId id="289" r:id="rId39"/>
     <p:sldId id="290" r:id="rId40"/>
+    <p:sldId id="291" r:id="rId41"/>
   </p:sldIdLst>
   <p:sldSz cy="5143500" cx="9144000"/>
   <p:notesSz cx="6858000" cy="9144000"/>
   <p:embeddedFontLst>
     <p:embeddedFont>
       <p:font typeface="Roboto"/>
-      <p:regular r:id="rId41"/>
-      <p:bold r:id="rId42"/>
-      <p:italic r:id="rId43"/>
-      <p:boldItalic r:id="rId44"/>
+      <p:regular r:id="rId42"/>
+      <p:bold r:id="rId43"/>
+      <p:italic r:id="rId44"/>
+      <p:boldItalic r:id="rId45"/>
     </p:embeddedFont>
   </p:embeddedFontLst>
   <p:defaultTextStyle>
@@ -1441,7 +1442,7 @@
       </p:grpSpPr>
       <p:sp>
         <p:nvSpPr>
-          <p:cNvPr id="266" name="Google Shape;266;g3dfd787d6ec_0_89:notes"/>
+          <p:cNvPr id="266" name="Google Shape;266;g3f5aabb0399_0_0:notes"/>
           <p:cNvSpPr/>
           <p:nvPr>
             <p:ph idx="2" type="sldImg"/>
@@ -1476,7 +1477,7 @@
       </p:sp>
       <p:sp>
         <p:nvSpPr>
-          <p:cNvPr id="267" name="Google Shape;267;g3dfd787d6ec_0_89:notes"/>
+          <p:cNvPr id="267" name="Google Shape;267;g3f5aabb0399_0_0:notes"/>
           <p:cNvSpPr txBox="1"/>
           <p:nvPr>
             <p:ph idx="1" type="body"/>
@@ -1526,7 +1527,7 @@
   <p:cSld>
     <p:spTree>
       <p:nvGrpSpPr>
-        <p:cNvPr id="271" name="Shape 271"/>
+        <p:cNvPr id="270" name="Shape 270"/>
         <p:cNvGrpSpPr/>
         <p:nvPr/>
       </p:nvGrpSpPr>
@@ -1540,7 +1541,7 @@
       </p:grpSpPr>
       <p:sp>
         <p:nvSpPr>
-          <p:cNvPr id="272" name="Google Shape;272;g3dfd787d6ec_0_94:notes"/>
+          <p:cNvPr id="271" name="Google Shape;271;g3dfd787d6ec_0_89:notes"/>
           <p:cNvSpPr/>
           <p:nvPr>
             <p:ph idx="2" type="sldImg"/>
@@ -1575,7 +1576,7 @@
       </p:sp>
       <p:sp>
         <p:nvSpPr>
-          <p:cNvPr id="273" name="Google Shape;273;g3dfd787d6ec_0_94:notes"/>
+          <p:cNvPr id="272" name="Google Shape;272;g3dfd787d6ec_0_89:notes"/>
           <p:cNvSpPr txBox="1"/>
           <p:nvPr>
             <p:ph idx="1" type="body"/>
@@ -1625,7 +1626,7 @@
   <p:cSld>
     <p:spTree>
       <p:nvGrpSpPr>
-        <p:cNvPr id="281" name="Shape 281"/>
+        <p:cNvPr id="276" name="Shape 276"/>
         <p:cNvGrpSpPr/>
         <p:nvPr/>
       </p:nvGrpSpPr>
@@ -1639,7 +1640,7 @@
       </p:grpSpPr>
       <p:sp>
         <p:nvSpPr>
-          <p:cNvPr id="282" name="Google Shape;282;g3dfd787d6ec_0_103:notes"/>
+          <p:cNvPr id="277" name="Google Shape;277;g3dfd787d6ec_0_94:notes"/>
           <p:cNvSpPr/>
           <p:nvPr>
             <p:ph idx="2" type="sldImg"/>
@@ -1674,7 +1675,7 @@
       </p:sp>
       <p:sp>
         <p:nvSpPr>
-          <p:cNvPr id="283" name="Google Shape;283;g3dfd787d6ec_0_103:notes"/>
+          <p:cNvPr id="278" name="Google Shape;278;g3dfd787d6ec_0_94:notes"/>
           <p:cNvSpPr txBox="1"/>
           <p:nvPr>
             <p:ph idx="1" type="body"/>
@@ -1724,7 +1725,7 @@
   <p:cSld>
     <p:spTree>
       <p:nvGrpSpPr>
-        <p:cNvPr id="288" name="Shape 288"/>
+        <p:cNvPr id="286" name="Shape 286"/>
         <p:cNvGrpSpPr/>
         <p:nvPr/>
       </p:nvGrpSpPr>
@@ -1738,7 +1739,7 @@
       </p:grpSpPr>
       <p:sp>
         <p:nvSpPr>
-          <p:cNvPr id="289" name="Google Shape;289;g3f4d4b161e2_2_0:notes"/>
+          <p:cNvPr id="287" name="Google Shape;287;g3dfd787d6ec_0_103:notes"/>
           <p:cNvSpPr/>
           <p:nvPr>
             <p:ph idx="2" type="sldImg"/>
@@ -1773,7 +1774,7 @@
       </p:sp>
       <p:sp>
         <p:nvSpPr>
-          <p:cNvPr id="290" name="Google Shape;290;g3f4d4b161e2_2_0:notes"/>
+          <p:cNvPr id="288" name="Google Shape;288;g3dfd787d6ec_0_103:notes"/>
           <p:cNvSpPr txBox="1"/>
           <p:nvPr>
             <p:ph idx="1" type="body"/>
@@ -1936,7 +1937,106 @@
       </p:grpSpPr>
       <p:sp>
         <p:nvSpPr>
-          <p:cNvPr id="294" name="Google Shape;294;g3f4d91c0644_1_497:notes"/>
+          <p:cNvPr id="294" name="Google Shape;294;g3f4d4b161e2_2_0:notes"/>
+          <p:cNvSpPr/>
+          <p:nvPr>
+            <p:ph idx="2" type="sldImg"/>
+          </p:nvPr>
+        </p:nvSpPr>
+        <p:spPr>
+          <a:xfrm>
+            <a:off x="381300" y="685800"/>
+            <a:ext cx="6096000" cy="3429000"/>
+          </a:xfrm>
+          <a:custGeom>
+            <a:rect b="b" l="l" r="r" t="t"/>
+            <a:pathLst>
+              <a:path extrusionOk="0" h="120000" w="120000">
+                <a:moveTo>
+                  <a:pt x="0" y="0"/>
+                </a:moveTo>
+                <a:lnTo>
+                  <a:pt x="120000" y="0"/>
+                </a:lnTo>
+                <a:lnTo>
+                  <a:pt x="120000" y="120000"/>
+                </a:lnTo>
+                <a:lnTo>
+                  <a:pt x="0" y="120000"/>
+                </a:lnTo>
+                <a:close/>
+              </a:path>
+            </a:pathLst>
+          </a:custGeom>
+        </p:spPr>
+      </p:sp>
+      <p:sp>
+        <p:nvSpPr>
+          <p:cNvPr id="295" name="Google Shape;295;g3f4d4b161e2_2_0:notes"/>
+          <p:cNvSpPr txBox="1"/>
+          <p:nvPr>
+            <p:ph idx="1" type="body"/>
+          </p:nvPr>
+        </p:nvSpPr>
+        <p:spPr>
+          <a:xfrm>
+            <a:off x="685800" y="4343400"/>
+            <a:ext cx="5486400" cy="4114800"/>
+          </a:xfrm>
+          <a:prstGeom prst="rect">
+            <a:avLst/>
+          </a:prstGeom>
+        </p:spPr>
+        <p:txBody>
+          <a:bodyPr anchorCtr="0" anchor="t" bIns="91425" lIns="91425" spcFirstLastPara="1" rIns="91425" wrap="square" tIns="91425">
+            <a:noAutofit/>
+          </a:bodyPr>
+          <a:lstStyle/>
+          <a:p>
+            <a:pPr indent="0" lvl="0" marL="0" rtl="0" algn="l">
+              <a:spcBef>
+                <a:spcPts val="0"/>
+              </a:spcBef>
+              <a:spcAft>
+                <a:spcPts val="0"/>
+              </a:spcAft>
+              <a:buNone/>
+            </a:pPr>
+            <a:r>
+              <a:t/>
+            </a:r>
+            <a:endParaRPr/>
+          </a:p>
+        </p:txBody>
+      </p:sp>
+    </p:spTree>
+  </p:cSld>
+  <p:clrMapOvr>
+    <a:masterClrMapping/>
+  </p:clrMapOvr>
+</p:notes>
+</file>
+
+<file path=ppt/notesSlides/notesSlide21.xml><?xml version="1.0" encoding="utf-8"?>
+<p:notes xmlns:a="http://schemas.openxmlformats.org/drawingml/2006/main" xmlns:r="http://schemas.openxmlformats.org/officeDocument/2006/relationships" xmlns:mc="http://schemas.openxmlformats.org/markup-compatibility/2006" xmlns:mv="urn:schemas-microsoft-com:mac:vml" xmlns:p="http://schemas.openxmlformats.org/presentationml/2006/main" xmlns:c="http://schemas.openxmlformats.org/drawingml/2006/chart" xmlns:dgm="http://schemas.openxmlformats.org/drawingml/2006/diagram" xmlns:o="urn:schemas-microsoft-com:office:office" xmlns:v="urn:schemas-microsoft-com:vml" xmlns:pvml="urn:schemas-microsoft-com:office:powerpoint" xmlns:com="http://schemas.openxmlformats.org/drawingml/2006/compatibility" xmlns:p14="http://schemas.microsoft.com/office/powerpoint/2010/main" xmlns:p15="http://schemas.microsoft.com/office/powerpoint/2012/main" xmlns:ahyp="http://schemas.microsoft.com/office/drawing/2018/hyperlinkcolor" showMasterPhAnim="0" showMasterSp="0">
+  <p:cSld>
+    <p:spTree>
+      <p:nvGrpSpPr>
+        <p:cNvPr id="298" name="Shape 298"/>
+        <p:cNvGrpSpPr/>
+        <p:nvPr/>
+      </p:nvGrpSpPr>
+      <p:grpSpPr>
+        <a:xfrm>
+          <a:off x="0" y="0"/>
+          <a:ext cx="0" cy="0"/>
+          <a:chOff x="0" y="0"/>
+          <a:chExt cx="0" cy="0"/>
+        </a:xfrm>
+      </p:grpSpPr>
+      <p:sp>
+        <p:nvSpPr>
+          <p:cNvPr id="299" name="Google Shape;299;g3f4d91c0644_1_497:notes"/>
           <p:cNvSpPr txBox="1"/>
           <p:nvPr>
             <p:ph idx="1" type="body"/>
@@ -1975,7 +2075,7 @@
       </p:sp>
       <p:sp>
         <p:nvSpPr>
-          <p:cNvPr id="295" name="Google Shape;295;g3f4d91c0644_1_497:notes"/>
+          <p:cNvPr id="300" name="Google Shape;300;g3f4d91c0644_1_497:notes"/>
           <p:cNvSpPr/>
           <p:nvPr>
             <p:ph idx="2" type="sldImg"/>
@@ -2016,12 +2116,12 @@
 </p:notes>
 </file>
 
-<file path=ppt/notesSlides/notesSlide21.xml><?xml version="1.0" encoding="utf-8"?>
+<file path=ppt/notesSlides/notesSlide22.xml><?xml version="1.0" encoding="utf-8"?>
 <p:notes xmlns:a="http://schemas.openxmlformats.org/drawingml/2006/main" xmlns:r="http://schemas.openxmlformats.org/officeDocument/2006/relationships" xmlns:mc="http://schemas.openxmlformats.org/markup-compatibility/2006" xmlns:mv="urn:schemas-microsoft-com:mac:vml" xmlns:p="http://schemas.openxmlformats.org/presentationml/2006/main" xmlns:c="http://schemas.openxmlformats.org/drawingml/2006/chart" xmlns:dgm="http://schemas.openxmlformats.org/drawingml/2006/diagram" xmlns:o="urn:schemas-microsoft-com:office:office" xmlns:v="urn:schemas-microsoft-com:vml" xmlns:pvml="urn:schemas-microsoft-com:office:powerpoint" xmlns:com="http://schemas.openxmlformats.org/drawingml/2006/compatibility" xmlns:p14="http://schemas.microsoft.com/office/powerpoint/2010/main" xmlns:p15="http://schemas.microsoft.com/office/powerpoint/2012/main" xmlns:ahyp="http://schemas.microsoft.com/office/drawing/2018/hyperlinkcolor" showMasterPhAnim="0" showMasterSp="0">
   <p:cSld>
     <p:spTree>
       <p:nvGrpSpPr>
-        <p:cNvPr id="299" name="Shape 299"/>
+        <p:cNvPr id="304" name="Shape 304"/>
         <p:cNvGrpSpPr/>
         <p:nvPr/>
       </p:nvGrpSpPr>
@@ -2035,7 +2135,7 @@
       </p:grpSpPr>
       <p:sp>
         <p:nvSpPr>
-          <p:cNvPr id="300" name="Google Shape;300;g3f4d91c0644_1_0:notes"/>
+          <p:cNvPr id="305" name="Google Shape;305;g3f4d91c0644_1_0:notes"/>
           <p:cNvSpPr/>
           <p:nvPr>
             <p:ph idx="2" type="sldImg"/>
@@ -2080,7 +2180,7 @@
       </p:sp>
       <p:sp>
         <p:nvSpPr>
-          <p:cNvPr id="301" name="Google Shape;301;g3f4d91c0644_1_0:notes"/>
+          <p:cNvPr id="306" name="Google Shape;306;g3f4d91c0644_1_0:notes"/>
           <p:cNvSpPr txBox="1"/>
           <p:nvPr>
             <p:ph idx="1" type="body"/>
@@ -2557,7 +2657,7 @@
       </p:sp>
       <p:sp>
         <p:nvSpPr>
-          <p:cNvPr id="302" name="Google Shape;302;g3f4d91c0644_1_0:notes"/>
+          <p:cNvPr id="307" name="Google Shape;307;g3f4d91c0644_1_0:notes"/>
           <p:cNvSpPr txBox="1"/>
           <p:nvPr>
             <p:ph idx="12" type="sldNum"/>
@@ -2606,12 +2706,12 @@
 </p:notes>
 </file>
 
-<file path=ppt/notesSlides/notesSlide22.xml><?xml version="1.0" encoding="utf-8"?>
+<file path=ppt/notesSlides/notesSlide23.xml><?xml version="1.0" encoding="utf-8"?>
 <p:notes xmlns:a="http://schemas.openxmlformats.org/drawingml/2006/main" xmlns:r="http://schemas.openxmlformats.org/officeDocument/2006/relationships" xmlns:mc="http://schemas.openxmlformats.org/markup-compatibility/2006" xmlns:mv="urn:schemas-microsoft-com:mac:vml" xmlns:p="http://schemas.openxmlformats.org/presentationml/2006/main" xmlns:c="http://schemas.openxmlformats.org/drawingml/2006/chart" xmlns:dgm="http://schemas.openxmlformats.org/drawingml/2006/diagram" xmlns:o="urn:schemas-microsoft-com:office:office" xmlns:v="urn:schemas-microsoft-com:vml" xmlns:pvml="urn:schemas-microsoft-com:office:powerpoint" xmlns:com="http://schemas.openxmlformats.org/drawingml/2006/compatibility" xmlns:p14="http://schemas.microsoft.com/office/powerpoint/2010/main" xmlns:p15="http://schemas.microsoft.com/office/powerpoint/2012/main" xmlns:ahyp="http://schemas.microsoft.com/office/drawing/2018/hyperlinkcolor" showMasterPhAnim="0" showMasterSp="0">
   <p:cSld>
     <p:spTree>
       <p:nvGrpSpPr>
-        <p:cNvPr id="308" name="Shape 308"/>
+        <p:cNvPr id="313" name="Shape 313"/>
         <p:cNvGrpSpPr/>
         <p:nvPr/>
       </p:nvGrpSpPr>
@@ -2625,7 +2725,7 @@
       </p:grpSpPr>
       <p:sp>
         <p:nvSpPr>
-          <p:cNvPr id="309" name="Google Shape;309;g3f4d91c0644_1_240:notes"/>
+          <p:cNvPr id="314" name="Google Shape;314;g3f4d91c0644_1_240:notes"/>
           <p:cNvSpPr/>
           <p:nvPr>
             <p:ph idx="2" type="sldImg"/>
@@ -2670,7 +2770,7 @@
       </p:sp>
       <p:sp>
         <p:nvSpPr>
-          <p:cNvPr id="310" name="Google Shape;310;g3f4d91c0644_1_240:notes"/>
+          <p:cNvPr id="315" name="Google Shape;315;g3f4d91c0644_1_240:notes"/>
           <p:cNvSpPr txBox="1"/>
           <p:nvPr>
             <p:ph idx="1" type="body"/>
@@ -2746,7 +2846,7 @@
       </p:sp>
       <p:sp>
         <p:nvSpPr>
-          <p:cNvPr id="311" name="Google Shape;311;g3f4d91c0644_1_240:notes"/>
+          <p:cNvPr id="316" name="Google Shape;316;g3f4d91c0644_1_240:notes"/>
           <p:cNvSpPr txBox="1"/>
           <p:nvPr>
             <p:ph idx="12" type="sldNum"/>
@@ -2795,12 +2895,12 @@
 </p:notes>
 </file>
 
-<file path=ppt/notesSlides/notesSlide23.xml><?xml version="1.0" encoding="utf-8"?>
+<file path=ppt/notesSlides/notesSlide24.xml><?xml version="1.0" encoding="utf-8"?>
 <p:notes xmlns:a="http://schemas.openxmlformats.org/drawingml/2006/main" xmlns:r="http://schemas.openxmlformats.org/officeDocument/2006/relationships" xmlns:mc="http://schemas.openxmlformats.org/markup-compatibility/2006" xmlns:mv="urn:schemas-microsoft-com:mac:vml" xmlns:p="http://schemas.openxmlformats.org/presentationml/2006/main" xmlns:c="http://schemas.openxmlformats.org/drawingml/2006/chart" xmlns:dgm="http://schemas.openxmlformats.org/drawingml/2006/diagram" xmlns:o="urn:schemas-microsoft-com:office:office" xmlns:v="urn:schemas-microsoft-com:vml" xmlns:pvml="urn:schemas-microsoft-com:office:powerpoint" xmlns:com="http://schemas.openxmlformats.org/drawingml/2006/compatibility" xmlns:p14="http://schemas.microsoft.com/office/powerpoint/2010/main" xmlns:p15="http://schemas.microsoft.com/office/powerpoint/2012/main" xmlns:ahyp="http://schemas.microsoft.com/office/drawing/2018/hyperlinkcolor" showMasterPhAnim="0" showMasterSp="0">
   <p:cSld>
     <p:spTree>
       <p:nvGrpSpPr>
-        <p:cNvPr id="320" name="Shape 320"/>
+        <p:cNvPr id="325" name="Shape 325"/>
         <p:cNvGrpSpPr/>
         <p:nvPr/>
       </p:nvGrpSpPr>
@@ -2814,7 +2914,7 @@
       </p:grpSpPr>
       <p:sp>
         <p:nvSpPr>
-          <p:cNvPr id="321" name="Google Shape;321;g3f4d91c0644_1_251:notes"/>
+          <p:cNvPr id="326" name="Google Shape;326;g3f4d91c0644_1_251:notes"/>
           <p:cNvSpPr/>
           <p:nvPr>
             <p:ph idx="2" type="sldImg"/>
@@ -2859,7 +2959,7 @@
       </p:sp>
       <p:sp>
         <p:nvSpPr>
-          <p:cNvPr id="322" name="Google Shape;322;g3f4d91c0644_1_251:notes"/>
+          <p:cNvPr id="327" name="Google Shape;327;g3f4d91c0644_1_251:notes"/>
           <p:cNvSpPr txBox="1"/>
           <p:nvPr>
             <p:ph idx="1" type="body"/>
@@ -3101,7 +3201,7 @@
       </p:sp>
       <p:sp>
         <p:nvSpPr>
-          <p:cNvPr id="323" name="Google Shape;323;g3f4d91c0644_1_251:notes"/>
+          <p:cNvPr id="328" name="Google Shape;328;g3f4d91c0644_1_251:notes"/>
           <p:cNvSpPr txBox="1"/>
           <p:nvPr>
             <p:ph idx="12" type="sldNum"/>
@@ -3150,12 +3250,12 @@
 </p:notes>
 </file>
 
-<file path=ppt/notesSlides/notesSlide24.xml><?xml version="1.0" encoding="utf-8"?>
+<file path=ppt/notesSlides/notesSlide25.xml><?xml version="1.0" encoding="utf-8"?>
 <p:notes xmlns:a="http://schemas.openxmlformats.org/drawingml/2006/main" xmlns:r="http://schemas.openxmlformats.org/officeDocument/2006/relationships" xmlns:mc="http://schemas.openxmlformats.org/markup-compatibility/2006" xmlns:mv="urn:schemas-microsoft-com:mac:vml" xmlns:p="http://schemas.openxmlformats.org/presentationml/2006/main" xmlns:c="http://schemas.openxmlformats.org/drawingml/2006/chart" xmlns:dgm="http://schemas.openxmlformats.org/drawingml/2006/diagram" xmlns:o="urn:schemas-microsoft-com:office:office" xmlns:v="urn:schemas-microsoft-com:vml" xmlns:pvml="urn:schemas-microsoft-com:office:powerpoint" xmlns:com="http://schemas.openxmlformats.org/drawingml/2006/compatibility" xmlns:p14="http://schemas.microsoft.com/office/powerpoint/2010/main" xmlns:p15="http://schemas.microsoft.com/office/powerpoint/2012/main" xmlns:ahyp="http://schemas.microsoft.com/office/drawing/2018/hyperlinkcolor" showMasterPhAnim="0" showMasterSp="0">
   <p:cSld>
     <p:spTree>
       <p:nvGrpSpPr>
-        <p:cNvPr id="335" name="Shape 335"/>
+        <p:cNvPr id="340" name="Shape 340"/>
         <p:cNvGrpSpPr/>
         <p:nvPr/>
       </p:nvGrpSpPr>
@@ -3169,7 +3269,7 @@
       </p:grpSpPr>
       <p:sp>
         <p:nvSpPr>
-          <p:cNvPr id="336" name="Google Shape;336;g3f4d91c0644_1_1241:notes"/>
+          <p:cNvPr id="341" name="Google Shape;341;g3f4d91c0644_1_1241:notes"/>
           <p:cNvSpPr txBox="1"/>
           <p:nvPr>
             <p:ph idx="1" type="body"/>
@@ -3208,7 +3308,7 @@
       </p:sp>
       <p:sp>
         <p:nvSpPr>
-          <p:cNvPr id="337" name="Google Shape;337;g3f4d91c0644_1_1241:notes"/>
+          <p:cNvPr id="342" name="Google Shape;342;g3f4d91c0644_1_1241:notes"/>
           <p:cNvSpPr/>
           <p:nvPr>
             <p:ph idx="2" type="sldImg"/>
@@ -3249,12 +3349,12 @@
 </p:notes>
 </file>
 
-<file path=ppt/notesSlides/notesSlide25.xml><?xml version="1.0" encoding="utf-8"?>
+<file path=ppt/notesSlides/notesSlide26.xml><?xml version="1.0" encoding="utf-8"?>
 <p:notes xmlns:a="http://schemas.openxmlformats.org/drawingml/2006/main" xmlns:r="http://schemas.openxmlformats.org/officeDocument/2006/relationships" xmlns:mc="http://schemas.openxmlformats.org/markup-compatibility/2006" xmlns:mv="urn:schemas-microsoft-com:mac:vml" xmlns:p="http://schemas.openxmlformats.org/presentationml/2006/main" xmlns:c="http://schemas.openxmlformats.org/drawingml/2006/chart" xmlns:dgm="http://schemas.openxmlformats.org/drawingml/2006/diagram" xmlns:o="urn:schemas-microsoft-com:office:office" xmlns:v="urn:schemas-microsoft-com:vml" xmlns:pvml="urn:schemas-microsoft-com:office:powerpoint" xmlns:com="http://schemas.openxmlformats.org/drawingml/2006/compatibility" xmlns:p14="http://schemas.microsoft.com/office/powerpoint/2010/main" xmlns:p15="http://schemas.microsoft.com/office/powerpoint/2012/main" xmlns:ahyp="http://schemas.microsoft.com/office/drawing/2018/hyperlinkcolor" showMasterPhAnim="0" showMasterSp="0">
   <p:cSld>
     <p:spTree>
       <p:nvGrpSpPr>
-        <p:cNvPr id="342" name="Shape 342"/>
+        <p:cNvPr id="347" name="Shape 347"/>
         <p:cNvGrpSpPr/>
         <p:nvPr/>
       </p:nvGrpSpPr>
@@ -3268,7 +3368,7 @@
       </p:grpSpPr>
       <p:sp>
         <p:nvSpPr>
-          <p:cNvPr id="343" name="Google Shape;343;g3f4d91c0644_1_1247:notes"/>
+          <p:cNvPr id="348" name="Google Shape;348;g3f4d91c0644_1_1247:notes"/>
           <p:cNvSpPr/>
           <p:nvPr>
             <p:ph idx="2" type="sldImg"/>
@@ -3313,7 +3413,7 @@
       </p:sp>
       <p:sp>
         <p:nvSpPr>
-          <p:cNvPr id="344" name="Google Shape;344;g3f4d91c0644_1_1247:notes"/>
+          <p:cNvPr id="349" name="Google Shape;349;g3f4d91c0644_1_1247:notes"/>
           <p:cNvSpPr txBox="1"/>
           <p:nvPr>
             <p:ph idx="1" type="body"/>
@@ -3555,7 +3655,7 @@
       </p:sp>
       <p:sp>
         <p:nvSpPr>
-          <p:cNvPr id="345" name="Google Shape;345;g3f4d91c0644_1_1247:notes"/>
+          <p:cNvPr id="350" name="Google Shape;350;g3f4d91c0644_1_1247:notes"/>
           <p:cNvSpPr txBox="1"/>
           <p:nvPr>
             <p:ph idx="12" type="sldNum"/>
@@ -3604,12 +3704,12 @@
 </p:notes>
 </file>
 
-<file path=ppt/notesSlides/notesSlide26.xml><?xml version="1.0" encoding="utf-8"?>
+<file path=ppt/notesSlides/notesSlide27.xml><?xml version="1.0" encoding="utf-8"?>
 <p:notes xmlns:a="http://schemas.openxmlformats.org/drawingml/2006/main" xmlns:r="http://schemas.openxmlformats.org/officeDocument/2006/relationships" xmlns:mc="http://schemas.openxmlformats.org/markup-compatibility/2006" xmlns:mv="urn:schemas-microsoft-com:mac:vml" xmlns:p="http://schemas.openxmlformats.org/presentationml/2006/main" xmlns:c="http://schemas.openxmlformats.org/drawingml/2006/chart" xmlns:dgm="http://schemas.openxmlformats.org/drawingml/2006/diagram" xmlns:o="urn:schemas-microsoft-com:office:office" xmlns:v="urn:schemas-microsoft-com:vml" xmlns:pvml="urn:schemas-microsoft-com:office:powerpoint" xmlns:com="http://schemas.openxmlformats.org/drawingml/2006/compatibility" xmlns:p14="http://schemas.microsoft.com/office/powerpoint/2010/main" xmlns:p15="http://schemas.microsoft.com/office/powerpoint/2012/main" xmlns:ahyp="http://schemas.microsoft.com/office/drawing/2018/hyperlinkcolor" showMasterPhAnim="0" showMasterSp="0">
   <p:cSld>
     <p:spTree>
       <p:nvGrpSpPr>
-        <p:cNvPr id="355" name="Shape 355"/>
+        <p:cNvPr id="360" name="Shape 360"/>
         <p:cNvGrpSpPr/>
         <p:nvPr/>
       </p:nvGrpSpPr>
@@ -3623,7 +3723,7 @@
       </p:grpSpPr>
       <p:sp>
         <p:nvSpPr>
-          <p:cNvPr id="356" name="Google Shape;356;g3f4d91c0644_1_1259:notes"/>
+          <p:cNvPr id="361" name="Google Shape;361;g3f4d91c0644_1_1259:notes"/>
           <p:cNvSpPr/>
           <p:nvPr>
             <p:ph idx="2" type="sldImg"/>
@@ -3668,7 +3768,7 @@
       </p:sp>
       <p:sp>
         <p:nvSpPr>
-          <p:cNvPr id="357" name="Google Shape;357;g3f4d91c0644_1_1259:notes"/>
+          <p:cNvPr id="362" name="Google Shape;362;g3f4d91c0644_1_1259:notes"/>
           <p:cNvSpPr txBox="1"/>
           <p:nvPr>
             <p:ph idx="1" type="body"/>
@@ -3744,7 +3844,7 @@
       </p:sp>
       <p:sp>
         <p:nvSpPr>
-          <p:cNvPr id="358" name="Google Shape;358;g3f4d91c0644_1_1259:notes"/>
+          <p:cNvPr id="363" name="Google Shape;363;g3f4d91c0644_1_1259:notes"/>
           <p:cNvSpPr txBox="1"/>
           <p:nvPr>
             <p:ph idx="12" type="sldNum"/>
@@ -3793,12 +3893,12 @@
 </p:notes>
 </file>
 
-<file path=ppt/notesSlides/notesSlide27.xml><?xml version="1.0" encoding="utf-8"?>
+<file path=ppt/notesSlides/notesSlide28.xml><?xml version="1.0" encoding="utf-8"?>
 <p:notes xmlns:a="http://schemas.openxmlformats.org/drawingml/2006/main" xmlns:r="http://schemas.openxmlformats.org/officeDocument/2006/relationships" xmlns:mc="http://schemas.openxmlformats.org/markup-compatibility/2006" xmlns:mv="urn:schemas-microsoft-com:mac:vml" xmlns:p="http://schemas.openxmlformats.org/presentationml/2006/main" xmlns:c="http://schemas.openxmlformats.org/drawingml/2006/chart" xmlns:dgm="http://schemas.openxmlformats.org/drawingml/2006/diagram" xmlns:o="urn:schemas-microsoft-com:office:office" xmlns:v="urn:schemas-microsoft-com:vml" xmlns:pvml="urn:schemas-microsoft-com:office:powerpoint" xmlns:com="http://schemas.openxmlformats.org/drawingml/2006/compatibility" xmlns:p14="http://schemas.microsoft.com/office/powerpoint/2010/main" xmlns:p15="http://schemas.microsoft.com/office/powerpoint/2012/main" xmlns:ahyp="http://schemas.microsoft.com/office/drawing/2018/hyperlinkcolor" showMasterPhAnim="0" showMasterSp="0">
   <p:cSld>
     <p:spTree>
       <p:nvGrpSpPr>
-        <p:cNvPr id="367" name="Shape 367"/>
+        <p:cNvPr id="372" name="Shape 372"/>
         <p:cNvGrpSpPr/>
         <p:nvPr/>
       </p:nvGrpSpPr>
@@ -3812,7 +3912,7 @@
       </p:grpSpPr>
       <p:sp>
         <p:nvSpPr>
-          <p:cNvPr id="368" name="Google Shape;368;g3f803d8f749_0_321:notes"/>
+          <p:cNvPr id="373" name="Google Shape;373;g3f803d8f749_0_321:notes"/>
           <p:cNvSpPr txBox="1"/>
           <p:nvPr>
             <p:ph idx="1" type="body"/>
@@ -3851,7 +3951,7 @@
       </p:sp>
       <p:sp>
         <p:nvSpPr>
-          <p:cNvPr id="369" name="Google Shape;369;g3f803d8f749_0_321:notes"/>
+          <p:cNvPr id="374" name="Google Shape;374;g3f803d8f749_0_321:notes"/>
           <p:cNvSpPr/>
           <p:nvPr>
             <p:ph idx="2" type="sldImg"/>
@@ -3892,12 +3992,12 @@
 </p:notes>
 </file>
 
-<file path=ppt/notesSlides/notesSlide28.xml><?xml version="1.0" encoding="utf-8"?>
+<file path=ppt/notesSlides/notesSlide29.xml><?xml version="1.0" encoding="utf-8"?>
 <p:notes xmlns:a="http://schemas.openxmlformats.org/drawingml/2006/main" xmlns:r="http://schemas.openxmlformats.org/officeDocument/2006/relationships" xmlns:mc="http://schemas.openxmlformats.org/markup-compatibility/2006" xmlns:mv="urn:schemas-microsoft-com:mac:vml" xmlns:p="http://schemas.openxmlformats.org/presentationml/2006/main" xmlns:c="http://schemas.openxmlformats.org/drawingml/2006/chart" xmlns:dgm="http://schemas.openxmlformats.org/drawingml/2006/diagram" xmlns:o="urn:schemas-microsoft-com:office:office" xmlns:v="urn:schemas-microsoft-com:vml" xmlns:pvml="urn:schemas-microsoft-com:office:powerpoint" xmlns:com="http://schemas.openxmlformats.org/drawingml/2006/compatibility" xmlns:p14="http://schemas.microsoft.com/office/powerpoint/2010/main" xmlns:p15="http://schemas.microsoft.com/office/powerpoint/2012/main" xmlns:ahyp="http://schemas.microsoft.com/office/drawing/2018/hyperlinkcolor" showMasterPhAnim="0" showMasterSp="0">
   <p:cSld>
     <p:spTree>
       <p:nvGrpSpPr>
-        <p:cNvPr id="372" name="Shape 372"/>
+        <p:cNvPr id="377" name="Shape 377"/>
         <p:cNvGrpSpPr/>
         <p:nvPr/>
       </p:nvGrpSpPr>
@@ -3911,7 +4011,7 @@
       </p:grpSpPr>
       <p:sp>
         <p:nvSpPr>
-          <p:cNvPr id="373" name="Google Shape;373;g3f803d8f749_0_838:notes"/>
+          <p:cNvPr id="378" name="Google Shape;378;g3f803d8f749_0_838:notes"/>
           <p:cNvSpPr/>
           <p:nvPr>
             <p:ph idx="2" type="sldImg"/>
@@ -3956,7 +4056,7 @@
       </p:sp>
       <p:sp>
         <p:nvSpPr>
-          <p:cNvPr id="374" name="Google Shape;374;g3f803d8f749_0_838:notes"/>
+          <p:cNvPr id="379" name="Google Shape;379;g3f803d8f749_0_838:notes"/>
           <p:cNvSpPr txBox="1"/>
           <p:nvPr>
             <p:ph idx="1" type="body"/>
@@ -4221,385 +4321,7 @@
       </p:sp>
       <p:sp>
         <p:nvSpPr>
-          <p:cNvPr id="375" name="Google Shape;375;g3f803d8f749_0_838:notes"/>
-          <p:cNvSpPr txBox="1"/>
-          <p:nvPr>
-            <p:ph idx="12" type="sldNum"/>
-          </p:nvPr>
-        </p:nvSpPr>
-        <p:spPr>
-          <a:xfrm>
-            <a:off x="3884613" y="6513910"/>
-            <a:ext cx="2971800" cy="344100"/>
-          </a:xfrm>
-          <a:prstGeom prst="rect">
-            <a:avLst/>
-          </a:prstGeom>
-          <a:noFill/>
-          <a:ln>
-            <a:noFill/>
-          </a:ln>
-        </p:spPr>
-        <p:txBody>
-          <a:bodyPr anchorCtr="0" anchor="ctr" bIns="91425" lIns="91425" spcFirstLastPara="1" rIns="91425" wrap="square" tIns="91425">
-            <a:noAutofit/>
-          </a:bodyPr>
-          <a:lstStyle/>
-          <a:p>
-            <a:pPr indent="0" lvl="0" marL="0" rtl="0" algn="l">
-              <a:spcBef>
-                <a:spcPts val="0"/>
-              </a:spcBef>
-              <a:spcAft>
-                <a:spcPts val="0"/>
-              </a:spcAft>
-              <a:buNone/>
-            </a:pPr>
-            <a:r>
-              <a:t/>
-            </a:r>
-            <a:endParaRPr/>
-          </a:p>
-        </p:txBody>
-      </p:sp>
-    </p:spTree>
-  </p:cSld>
-  <p:clrMapOvr>
-    <a:masterClrMapping/>
-  </p:clrMapOvr>
-</p:notes>
-</file>
-
-<file path=ppt/notesSlides/notesSlide29.xml><?xml version="1.0" encoding="utf-8"?>
-<p:notes xmlns:a="http://schemas.openxmlformats.org/drawingml/2006/main" xmlns:r="http://schemas.openxmlformats.org/officeDocument/2006/relationships" xmlns:mc="http://schemas.openxmlformats.org/markup-compatibility/2006" xmlns:mv="urn:schemas-microsoft-com:mac:vml" xmlns:p="http://schemas.openxmlformats.org/presentationml/2006/main" xmlns:c="http://schemas.openxmlformats.org/drawingml/2006/chart" xmlns:dgm="http://schemas.openxmlformats.org/drawingml/2006/diagram" xmlns:o="urn:schemas-microsoft-com:office:office" xmlns:v="urn:schemas-microsoft-com:vml" xmlns:pvml="urn:schemas-microsoft-com:office:powerpoint" xmlns:com="http://schemas.openxmlformats.org/drawingml/2006/compatibility" xmlns:p14="http://schemas.microsoft.com/office/powerpoint/2010/main" xmlns:p15="http://schemas.microsoft.com/office/powerpoint/2012/main" xmlns:ahyp="http://schemas.microsoft.com/office/drawing/2018/hyperlinkcolor" showMasterPhAnim="0" showMasterSp="0">
-  <p:cSld>
-    <p:spTree>
-      <p:nvGrpSpPr>
-        <p:cNvPr id="382" name="Shape 382"/>
-        <p:cNvGrpSpPr/>
-        <p:nvPr/>
-      </p:nvGrpSpPr>
-      <p:grpSpPr>
-        <a:xfrm>
-          <a:off x="0" y="0"/>
-          <a:ext cx="0" cy="0"/>
-          <a:chOff x="0" y="0"/>
-          <a:chExt cx="0" cy="0"/>
-        </a:xfrm>
-      </p:grpSpPr>
-      <p:sp>
-        <p:nvSpPr>
-          <p:cNvPr id="383" name="Google Shape;383;g3f803d8f749_0_847:notes"/>
-          <p:cNvSpPr/>
-          <p:nvPr>
-            <p:ph idx="2" type="sldImg"/>
-          </p:nvPr>
-        </p:nvSpPr>
-        <p:spPr>
-          <a:xfrm>
-            <a:off x="685800" y="857250"/>
-            <a:ext cx="5486400" cy="2314500"/>
-          </a:xfrm>
-          <a:custGeom>
-            <a:rect b="b" l="l" r="r" t="t"/>
-            <a:pathLst>
-              <a:path extrusionOk="0" h="120000" w="120000">
-                <a:moveTo>
-                  <a:pt x="0" y="0"/>
-                </a:moveTo>
-                <a:lnTo>
-                  <a:pt x="120000" y="0"/>
-                </a:lnTo>
-                <a:lnTo>
-                  <a:pt x="120000" y="120000"/>
-                </a:lnTo>
-                <a:lnTo>
-                  <a:pt x="0" y="120000"/>
-                </a:lnTo>
-                <a:close/>
-              </a:path>
-            </a:pathLst>
-          </a:custGeom>
-          <a:noFill/>
-          <a:ln cap="flat" cmpd="sng" w="12700">
-            <a:solidFill>
-              <a:srgbClr val="000000"/>
-            </a:solidFill>
-            <a:prstDash val="solid"/>
-            <a:round/>
-            <a:headEnd len="sm" w="sm" type="none"/>
-            <a:tailEnd len="sm" w="sm" type="none"/>
-          </a:ln>
-        </p:spPr>
-      </p:sp>
-      <p:sp>
-        <p:nvSpPr>
-          <p:cNvPr id="384" name="Google Shape;384;g3f803d8f749_0_847:notes"/>
-          <p:cNvSpPr txBox="1"/>
-          <p:nvPr>
-            <p:ph idx="1" type="body"/>
-          </p:nvPr>
-        </p:nvSpPr>
-        <p:spPr>
-          <a:xfrm>
-            <a:off x="685800" y="3300413"/>
-            <a:ext cx="5486400" cy="2700600"/>
-          </a:xfrm>
-          <a:prstGeom prst="rect">
-            <a:avLst/>
-          </a:prstGeom>
-          <a:noFill/>
-          <a:ln>
-            <a:noFill/>
-          </a:ln>
-        </p:spPr>
-        <p:txBody>
-          <a:bodyPr anchorCtr="0" anchor="t" bIns="45700" lIns="91425" spcFirstLastPara="1" rIns="91425" wrap="square" tIns="45700">
-            <a:noAutofit/>
-          </a:bodyPr>
-          <a:lstStyle/>
-          <a:p>
-            <a:pPr indent="0" lvl="0" marL="0" rtl="0" algn="l">
-              <a:spcBef>
-                <a:spcPts val="0"/>
-              </a:spcBef>
-              <a:spcAft>
-                <a:spcPts val="0"/>
-              </a:spcAft>
-              <a:buNone/>
-            </a:pPr>
-            <a:r>
-              <a:rPr lang="en" sz="1200">
-                <a:solidFill>
-                  <a:schemeClr val="dk1"/>
-                </a:solidFill>
-                <a:latin typeface="Calibri"/>
-                <a:ea typeface="Calibri"/>
-                <a:cs typeface="Calibri"/>
-                <a:sym typeface="Calibri"/>
-              </a:rPr>
-              <a:t>s = "abcdefghijklmnopqrstuvwxyz"</a:t>
-            </a:r>
-            <a:endParaRPr/>
-          </a:p>
-          <a:p>
-            <a:pPr indent="0" lvl="0" marL="0" rtl="0" algn="l">
-              <a:spcBef>
-                <a:spcPts val="0"/>
-              </a:spcBef>
-              <a:spcAft>
-                <a:spcPts val="0"/>
-              </a:spcAft>
-              <a:buNone/>
-            </a:pPr>
-            <a:r>
-              <a:t/>
-            </a:r>
-            <a:endParaRPr sz="1200">
-              <a:solidFill>
-                <a:schemeClr val="dk1"/>
-              </a:solidFill>
-              <a:latin typeface="Calibri"/>
-              <a:ea typeface="Calibri"/>
-              <a:cs typeface="Calibri"/>
-              <a:sym typeface="Calibri"/>
-            </a:endParaRPr>
-          </a:p>
-          <a:p>
-            <a:pPr indent="0" lvl="0" marL="0" rtl="0" algn="l">
-              <a:spcBef>
-                <a:spcPts val="0"/>
-              </a:spcBef>
-              <a:spcAft>
-                <a:spcPts val="0"/>
-              </a:spcAft>
-              <a:buNone/>
-            </a:pPr>
-            <a:r>
-              <a:rPr lang="en" sz="1200">
-                <a:solidFill>
-                  <a:schemeClr val="dk1"/>
-                </a:solidFill>
-                <a:latin typeface="Calibri"/>
-                <a:ea typeface="Calibri"/>
-                <a:cs typeface="Calibri"/>
-                <a:sym typeface="Calibri"/>
-              </a:rPr>
-              <a:t># a)</a:t>
-            </a:r>
-            <a:endParaRPr/>
-          </a:p>
-          <a:p>
-            <a:pPr indent="0" lvl="0" marL="0" rtl="0" algn="l">
-              <a:spcBef>
-                <a:spcPts val="0"/>
-              </a:spcBef>
-              <a:spcAft>
-                <a:spcPts val="0"/>
-              </a:spcAft>
-              <a:buNone/>
-            </a:pPr>
-            <a:r>
-              <a:rPr lang="en" sz="1200">
-                <a:solidFill>
-                  <a:schemeClr val="dk1"/>
-                </a:solidFill>
-                <a:latin typeface="Calibri"/>
-                <a:ea typeface="Calibri"/>
-                <a:cs typeface="Calibri"/>
-                <a:sym typeface="Calibri"/>
-              </a:rPr>
-              <a:t>print(s[::2])      # 'acegikmoqsuwy'</a:t>
-            </a:r>
-            <a:endParaRPr/>
-          </a:p>
-          <a:p>
-            <a:pPr indent="0" lvl="0" marL="0" rtl="0" algn="l">
-              <a:spcBef>
-                <a:spcPts val="0"/>
-              </a:spcBef>
-              <a:spcAft>
-                <a:spcPts val="0"/>
-              </a:spcAft>
-              <a:buNone/>
-            </a:pPr>
-            <a:r>
-              <a:t/>
-            </a:r>
-            <a:endParaRPr sz="1200">
-              <a:solidFill>
-                <a:schemeClr val="dk1"/>
-              </a:solidFill>
-              <a:latin typeface="Calibri"/>
-              <a:ea typeface="Calibri"/>
-              <a:cs typeface="Calibri"/>
-              <a:sym typeface="Calibri"/>
-            </a:endParaRPr>
-          </a:p>
-          <a:p>
-            <a:pPr indent="0" lvl="0" marL="0" rtl="0" algn="l">
-              <a:spcBef>
-                <a:spcPts val="0"/>
-              </a:spcBef>
-              <a:spcAft>
-                <a:spcPts val="0"/>
-              </a:spcAft>
-              <a:buNone/>
-            </a:pPr>
-            <a:r>
-              <a:rPr lang="en" sz="1200">
-                <a:solidFill>
-                  <a:schemeClr val="dk1"/>
-                </a:solidFill>
-                <a:latin typeface="Calibri"/>
-                <a:ea typeface="Calibri"/>
-                <a:cs typeface="Calibri"/>
-                <a:sym typeface="Calibri"/>
-              </a:rPr>
-              <a:t># b)</a:t>
-            </a:r>
-            <a:endParaRPr/>
-          </a:p>
-          <a:p>
-            <a:pPr indent="0" lvl="0" marL="0" rtl="0" algn="l">
-              <a:spcBef>
-                <a:spcPts val="0"/>
-              </a:spcBef>
-              <a:spcAft>
-                <a:spcPts val="0"/>
-              </a:spcAft>
-              <a:buNone/>
-            </a:pPr>
-            <a:r>
-              <a:rPr lang="en" sz="1200">
-                <a:solidFill>
-                  <a:schemeClr val="dk1"/>
-                </a:solidFill>
-                <a:latin typeface="Calibri"/>
-                <a:ea typeface="Calibri"/>
-                <a:cs typeface="Calibri"/>
-                <a:sym typeface="Calibri"/>
-              </a:rPr>
-              <a:t>print(s[::-1])     # 'zyxwvuts...a'</a:t>
-            </a:r>
-            <a:endParaRPr/>
-          </a:p>
-          <a:p>
-            <a:pPr indent="0" lvl="0" marL="0" rtl="0" algn="l">
-              <a:spcBef>
-                <a:spcPts val="0"/>
-              </a:spcBef>
-              <a:spcAft>
-                <a:spcPts val="0"/>
-              </a:spcAft>
-              <a:buNone/>
-            </a:pPr>
-            <a:r>
-              <a:t/>
-            </a:r>
-            <a:endParaRPr sz="1200">
-              <a:solidFill>
-                <a:schemeClr val="dk1"/>
-              </a:solidFill>
-              <a:latin typeface="Calibri"/>
-              <a:ea typeface="Calibri"/>
-              <a:cs typeface="Calibri"/>
-              <a:sym typeface="Calibri"/>
-            </a:endParaRPr>
-          </a:p>
-          <a:p>
-            <a:pPr indent="0" lvl="0" marL="0" rtl="0" algn="l">
-              <a:spcBef>
-                <a:spcPts val="0"/>
-              </a:spcBef>
-              <a:spcAft>
-                <a:spcPts val="0"/>
-              </a:spcAft>
-              <a:buNone/>
-            </a:pPr>
-            <a:r>
-              <a:rPr lang="en" sz="1200">
-                <a:solidFill>
-                  <a:schemeClr val="dk1"/>
-                </a:solidFill>
-                <a:latin typeface="Calibri"/>
-                <a:ea typeface="Calibri"/>
-                <a:cs typeface="Calibri"/>
-                <a:sym typeface="Calibri"/>
-              </a:rPr>
-              <a:t># c)</a:t>
-            </a:r>
-            <a:endParaRPr/>
-          </a:p>
-          <a:p>
-            <a:pPr indent="0" lvl="0" marL="0" rtl="0" algn="l">
-              <a:spcBef>
-                <a:spcPts val="0"/>
-              </a:spcBef>
-              <a:spcAft>
-                <a:spcPts val="0"/>
-              </a:spcAft>
-              <a:buNone/>
-            </a:pPr>
-            <a:r>
-              <a:rPr lang="en" sz="1200">
-                <a:solidFill>
-                  <a:schemeClr val="dk1"/>
-                </a:solidFill>
-                <a:latin typeface="Calibri"/>
-                <a:ea typeface="Calibri"/>
-                <a:cs typeface="Calibri"/>
-                <a:sym typeface="Calibri"/>
-              </a:rPr>
-              <a:t>print(s[1::3])     # 'behknqtwz'</a:t>
-            </a:r>
-            <a:endParaRPr/>
-          </a:p>
-        </p:txBody>
-      </p:sp>
-      <p:sp>
-        <p:nvSpPr>
-          <p:cNvPr id="385" name="Google Shape;385;g3f803d8f749_0_847:notes"/>
+          <p:cNvPr id="380" name="Google Shape;380;g3f803d8f749_0_838:notes"/>
           <p:cNvSpPr txBox="1"/>
           <p:nvPr>
             <p:ph idx="12" type="sldNum"/>
@@ -4752,7 +4474,7 @@
   <p:cSld>
     <p:spTree>
       <p:nvGrpSpPr>
-        <p:cNvPr id="392" name="Shape 392"/>
+        <p:cNvPr id="387" name="Shape 387"/>
         <p:cNvGrpSpPr/>
         <p:nvPr/>
       </p:nvGrpSpPr>
@@ -4766,7 +4488,7 @@
       </p:grpSpPr>
       <p:sp>
         <p:nvSpPr>
-          <p:cNvPr id="393" name="Google Shape;393;g3f803d8f749_0_856:notes"/>
+          <p:cNvPr id="388" name="Google Shape;388;g3f803d8f749_0_847:notes"/>
           <p:cNvSpPr/>
           <p:nvPr>
             <p:ph idx="2" type="sldImg"/>
@@ -4811,7 +4533,7 @@
       </p:sp>
       <p:sp>
         <p:nvSpPr>
-          <p:cNvPr id="394" name="Google Shape;394;g3f803d8f749_0_856:notes"/>
+          <p:cNvPr id="389" name="Google Shape;389;g3f803d8f749_0_847:notes"/>
           <p:cNvSpPr txBox="1"/>
           <p:nvPr>
             <p:ph idx="1" type="body"/>
@@ -4855,7 +4577,7 @@
                 <a:cs typeface="Calibri"/>
                 <a:sym typeface="Calibri"/>
               </a:rPr>
-              <a:t>s = "Python Programming"</a:t>
+              <a:t>s = "abcdefghijklmnopqrstuvwxyz"</a:t>
             </a:r>
             <a:endParaRPr/>
           </a:p>
@@ -4926,7 +4648,7 @@
                 <a:cs typeface="Calibri"/>
                 <a:sym typeface="Calibri"/>
               </a:rPr>
-              <a:t>print(s[-11:])     # 'Programming'</a:t>
+              <a:t>print(s[::2])      # 'acegikmoqsuwy'</a:t>
             </a:r>
             <a:endParaRPr/>
           </a:p>
@@ -4997,7 +4719,7 @@
                 <a:cs typeface="Calibri"/>
                 <a:sym typeface="Calibri"/>
               </a:rPr>
-              <a:t>print(s[:-3])      # 'Python Programm'</a:t>
+              <a:t>print(s[::-1])     # 'zyxwvuts...a'</a:t>
             </a:r>
             <a:endParaRPr/>
           </a:p>
@@ -5068,7 +4790,7 @@
                 <a:cs typeface="Calibri"/>
                 <a:sym typeface="Calibri"/>
               </a:rPr>
-              <a:t>print(s[-3:])      # 'ing'</a:t>
+              <a:t>print(s[1::3])     # 'behknqtwz'</a:t>
             </a:r>
             <a:endParaRPr/>
           </a:p>
@@ -5076,7 +4798,7 @@
       </p:sp>
       <p:sp>
         <p:nvSpPr>
-          <p:cNvPr id="395" name="Google Shape;395;g3f803d8f749_0_856:notes"/>
+          <p:cNvPr id="390" name="Google Shape;390;g3f803d8f749_0_847:notes"/>
           <p:cNvSpPr txBox="1"/>
           <p:nvPr>
             <p:ph idx="12" type="sldNum"/>
@@ -5130,7 +4852,7 @@
   <p:cSld>
     <p:spTree>
       <p:nvGrpSpPr>
-        <p:cNvPr id="402" name="Shape 402"/>
+        <p:cNvPr id="397" name="Shape 397"/>
         <p:cNvGrpSpPr/>
         <p:nvPr/>
       </p:nvGrpSpPr>
@@ -5144,7 +4866,7 @@
       </p:grpSpPr>
       <p:sp>
         <p:nvSpPr>
-          <p:cNvPr id="403" name="Google Shape;403;g3f803d8f749_0_877:notes"/>
+          <p:cNvPr id="398" name="Google Shape;398;g3f803d8f749_0_856:notes"/>
           <p:cNvSpPr/>
           <p:nvPr>
             <p:ph idx="2" type="sldImg"/>
@@ -5189,7 +4911,7 @@
       </p:sp>
       <p:sp>
         <p:nvSpPr>
-          <p:cNvPr id="404" name="Google Shape;404;g3f803d8f749_0_877:notes"/>
+          <p:cNvPr id="399" name="Google Shape;399;g3f803d8f749_0_856:notes"/>
           <p:cNvSpPr txBox="1"/>
           <p:nvPr>
             <p:ph idx="1" type="body"/>
@@ -5233,7 +4955,7 @@
                 <a:cs typeface="Calibri"/>
                 <a:sym typeface="Calibri"/>
               </a:rPr>
-              <a:t>date = "2026-07-12"</a:t>
+              <a:t>s = "Python Programming"</a:t>
             </a:r>
             <a:endParaRPr/>
           </a:p>
@@ -5304,31 +5026,7 @@
                 <a:cs typeface="Calibri"/>
                 <a:sym typeface="Calibri"/>
               </a:rPr>
-              <a:t>year, month, day = date[:4], date[5:7], date[8:]</a:t>
-            </a:r>
-            <a:endParaRPr/>
-          </a:p>
-          <a:p>
-            <a:pPr indent="0" lvl="0" marL="0" rtl="0" algn="l">
-              <a:spcBef>
-                <a:spcPts val="0"/>
-              </a:spcBef>
-              <a:spcAft>
-                <a:spcPts val="0"/>
-              </a:spcAft>
-              <a:buNone/>
-            </a:pPr>
-            <a:r>
-              <a:rPr lang="en" sz="1200">
-                <a:solidFill>
-                  <a:schemeClr val="dk1"/>
-                </a:solidFill>
-                <a:latin typeface="Calibri"/>
-                <a:ea typeface="Calibri"/>
-                <a:cs typeface="Calibri"/>
-                <a:sym typeface="Calibri"/>
-              </a:rPr>
-              <a:t>print(year, month, day)   # 2026 07 12</a:t>
+              <a:t>print(s[-11:])     # 'Programming'</a:t>
             </a:r>
             <a:endParaRPr/>
           </a:p>
@@ -5399,9 +5097,32 @@
                 <a:cs typeface="Calibri"/>
                 <a:sym typeface="Calibri"/>
               </a:rPr>
-              <a:t>rearranged = date[8:] + "-" + date[5:7] + "-" + date[:4]</a:t>
+              <a:t>print(s[:-3])      # 'Python Programm'</a:t>
             </a:r>
             <a:endParaRPr/>
+          </a:p>
+          <a:p>
+            <a:pPr indent="0" lvl="0" marL="0" rtl="0" algn="l">
+              <a:spcBef>
+                <a:spcPts val="0"/>
+              </a:spcBef>
+              <a:spcAft>
+                <a:spcPts val="0"/>
+              </a:spcAft>
+              <a:buNone/>
+            </a:pPr>
+            <a:r>
+              <a:t/>
+            </a:r>
+            <a:endParaRPr sz="1200">
+              <a:solidFill>
+                <a:schemeClr val="dk1"/>
+              </a:solidFill>
+              <a:latin typeface="Calibri"/>
+              <a:ea typeface="Calibri"/>
+              <a:cs typeface="Calibri"/>
+              <a:sym typeface="Calibri"/>
+            </a:endParaRPr>
           </a:p>
           <a:p>
             <a:pPr indent="0" lvl="0" marL="0" rtl="0" algn="l">
@@ -5423,7 +5144,31 @@
                 <a:cs typeface="Calibri"/>
                 <a:sym typeface="Calibri"/>
               </a:rPr>
-              <a:t>print(rearranged)         # 12-07-2026</a:t>
+              <a:t># c)</a:t>
+            </a:r>
+            <a:endParaRPr/>
+          </a:p>
+          <a:p>
+            <a:pPr indent="0" lvl="0" marL="0" rtl="0" algn="l">
+              <a:spcBef>
+                <a:spcPts val="0"/>
+              </a:spcBef>
+              <a:spcAft>
+                <a:spcPts val="0"/>
+              </a:spcAft>
+              <a:buNone/>
+            </a:pPr>
+            <a:r>
+              <a:rPr lang="en" sz="1200">
+                <a:solidFill>
+                  <a:schemeClr val="dk1"/>
+                </a:solidFill>
+                <a:latin typeface="Calibri"/>
+                <a:ea typeface="Calibri"/>
+                <a:cs typeface="Calibri"/>
+                <a:sym typeface="Calibri"/>
+              </a:rPr>
+              <a:t>print(s[-3:])      # 'ing'</a:t>
             </a:r>
             <a:endParaRPr/>
           </a:p>
@@ -5431,7 +5176,7 @@
       </p:sp>
       <p:sp>
         <p:nvSpPr>
-          <p:cNvPr id="405" name="Google Shape;405;g3f803d8f749_0_877:notes"/>
+          <p:cNvPr id="400" name="Google Shape;400;g3f803d8f749_0_856:notes"/>
           <p:cNvSpPr txBox="1"/>
           <p:nvPr>
             <p:ph idx="12" type="sldNum"/>
@@ -5485,7 +5230,7 @@
   <p:cSld>
     <p:spTree>
       <p:nvGrpSpPr>
-        <p:cNvPr id="411" name="Shape 411"/>
+        <p:cNvPr id="407" name="Shape 407"/>
         <p:cNvGrpSpPr/>
         <p:nvPr/>
       </p:nvGrpSpPr>
@@ -5499,106 +5244,7 @@
       </p:grpSpPr>
       <p:sp>
         <p:nvSpPr>
-          <p:cNvPr id="412" name="Google Shape;412;g3f4d91c0644_2_1:notes"/>
-          <p:cNvSpPr txBox="1"/>
-          <p:nvPr>
-            <p:ph idx="1" type="body"/>
-          </p:nvPr>
-        </p:nvSpPr>
-        <p:spPr>
-          <a:xfrm>
-            <a:off x="685800" y="3300413"/>
-            <a:ext cx="5486400" cy="2700600"/>
-          </a:xfrm>
-          <a:prstGeom prst="rect">
-            <a:avLst/>
-          </a:prstGeom>
-        </p:spPr>
-        <p:txBody>
-          <a:bodyPr anchorCtr="0" anchor="t" bIns="91425" lIns="91425" spcFirstLastPara="1" rIns="91425" wrap="square" tIns="91425">
-            <a:noAutofit/>
-          </a:bodyPr>
-          <a:lstStyle/>
-          <a:p>
-            <a:pPr indent="0" lvl="0" marL="0" rtl="0" algn="l">
-              <a:spcBef>
-                <a:spcPts val="0"/>
-              </a:spcBef>
-              <a:spcAft>
-                <a:spcPts val="0"/>
-              </a:spcAft>
-              <a:buNone/>
-            </a:pPr>
-            <a:r>
-              <a:t/>
-            </a:r>
-            <a:endParaRPr/>
-          </a:p>
-        </p:txBody>
-      </p:sp>
-      <p:sp>
-        <p:nvSpPr>
-          <p:cNvPr id="413" name="Google Shape;413;g3f4d91c0644_2_1:notes"/>
-          <p:cNvSpPr/>
-          <p:nvPr>
-            <p:ph idx="2" type="sldImg"/>
-          </p:nvPr>
-        </p:nvSpPr>
-        <p:spPr>
-          <a:xfrm>
-            <a:off x="685800" y="857250"/>
-            <a:ext cx="5486400" cy="2314500"/>
-          </a:xfrm>
-          <a:custGeom>
-            <a:rect b="b" l="l" r="r" t="t"/>
-            <a:pathLst>
-              <a:path extrusionOk="0" h="120000" w="120000">
-                <a:moveTo>
-                  <a:pt x="0" y="0"/>
-                </a:moveTo>
-                <a:lnTo>
-                  <a:pt x="120000" y="0"/>
-                </a:lnTo>
-                <a:lnTo>
-                  <a:pt x="120000" y="120000"/>
-                </a:lnTo>
-                <a:lnTo>
-                  <a:pt x="0" y="120000"/>
-                </a:lnTo>
-                <a:close/>
-              </a:path>
-            </a:pathLst>
-          </a:custGeom>
-        </p:spPr>
-      </p:sp>
-    </p:spTree>
-  </p:cSld>
-  <p:clrMapOvr>
-    <a:masterClrMapping/>
-  </p:clrMapOvr>
-</p:notes>
-</file>
-
-<file path=ppt/notesSlides/notesSlide33.xml><?xml version="1.0" encoding="utf-8"?>
-<p:notes xmlns:a="http://schemas.openxmlformats.org/drawingml/2006/main" xmlns:r="http://schemas.openxmlformats.org/officeDocument/2006/relationships" xmlns:mc="http://schemas.openxmlformats.org/markup-compatibility/2006" xmlns:mv="urn:schemas-microsoft-com:mac:vml" xmlns:p="http://schemas.openxmlformats.org/presentationml/2006/main" xmlns:c="http://schemas.openxmlformats.org/drawingml/2006/chart" xmlns:dgm="http://schemas.openxmlformats.org/drawingml/2006/diagram" xmlns:o="urn:schemas-microsoft-com:office:office" xmlns:v="urn:schemas-microsoft-com:vml" xmlns:pvml="urn:schemas-microsoft-com:office:powerpoint" xmlns:com="http://schemas.openxmlformats.org/drawingml/2006/compatibility" xmlns:p14="http://schemas.microsoft.com/office/powerpoint/2010/main" xmlns:p15="http://schemas.microsoft.com/office/powerpoint/2012/main" xmlns:ahyp="http://schemas.microsoft.com/office/drawing/2018/hyperlinkcolor" showMasterPhAnim="0" showMasterSp="0">
-  <p:cSld>
-    <p:spTree>
-      <p:nvGrpSpPr>
-        <p:cNvPr id="418" name="Shape 418"/>
-        <p:cNvGrpSpPr/>
-        <p:nvPr/>
-      </p:nvGrpSpPr>
-      <p:grpSpPr>
-        <a:xfrm>
-          <a:off x="0" y="0"/>
-          <a:ext cx="0" cy="0"/>
-          <a:chOff x="0" y="0"/>
-          <a:chExt cx="0" cy="0"/>
-        </a:xfrm>
-      </p:grpSpPr>
-      <p:sp>
-        <p:nvSpPr>
-          <p:cNvPr id="419" name="Google Shape;419;g3f4d91c0644_2_7:notes"/>
+          <p:cNvPr id="408" name="Google Shape;408;g3f803d8f749_0_877:notes"/>
           <p:cNvSpPr/>
           <p:nvPr>
             <p:ph idx="2" type="sldImg"/>
@@ -5643,7 +5289,7 @@
       </p:sp>
       <p:sp>
         <p:nvSpPr>
-          <p:cNvPr id="420" name="Google Shape;420;g3f4d91c0644_2_7:notes"/>
+          <p:cNvPr id="409" name="Google Shape;409;g3f803d8f749_0_877:notes"/>
           <p:cNvSpPr txBox="1"/>
           <p:nvPr>
             <p:ph idx="1" type="body"/>
@@ -5687,31 +5333,7 @@
                 <a:cs typeface="Calibri"/>
                 <a:sym typeface="Calibri"/>
               </a:rPr>
-              <a:t>score = 72</a:t>
-            </a:r>
-            <a:endParaRPr/>
-          </a:p>
-          <a:p>
-            <a:pPr indent="0" lvl="0" marL="0" rtl="0" algn="l">
-              <a:spcBef>
-                <a:spcPts val="0"/>
-              </a:spcBef>
-              <a:spcAft>
-                <a:spcPts val="0"/>
-              </a:spcAft>
-              <a:buNone/>
-            </a:pPr>
-            <a:r>
-              <a:rPr lang="en" sz="1200">
-                <a:solidFill>
-                  <a:schemeClr val="dk1"/>
-                </a:solidFill>
-                <a:latin typeface="Calibri"/>
-                <a:ea typeface="Calibri"/>
-                <a:cs typeface="Calibri"/>
-                <a:sym typeface="Calibri"/>
-              </a:rPr>
-              <a:t>pass_mark = 50</a:t>
+              <a:t>date = "2026-07-12"</a:t>
             </a:r>
             <a:endParaRPr/>
           </a:p>
@@ -5758,7 +5380,7 @@
                 <a:cs typeface="Calibri"/>
                 <a:sym typeface="Calibri"/>
               </a:rPr>
-              <a:t>print(score &gt; pass_mark)</a:t>
+              <a:t># a)</a:t>
             </a:r>
             <a:endParaRPr/>
           </a:p>
@@ -5782,7 +5404,7 @@
                 <a:cs typeface="Calibri"/>
                 <a:sym typeface="Calibri"/>
               </a:rPr>
-              <a:t>print(score != 100)</a:t>
+              <a:t>year, month, day = date[:4], date[5:7], date[8:]</a:t>
             </a:r>
             <a:endParaRPr/>
           </a:p>
@@ -5806,9 +5428,32 @@
                 <a:cs typeface="Calibri"/>
                 <a:sym typeface="Calibri"/>
               </a:rPr>
-              <a:t>print(score == 72)</a:t>
+              <a:t>print(year, month, day)   # 2026 07 12</a:t>
             </a:r>
             <a:endParaRPr/>
+          </a:p>
+          <a:p>
+            <a:pPr indent="0" lvl="0" marL="0" rtl="0" algn="l">
+              <a:spcBef>
+                <a:spcPts val="0"/>
+              </a:spcBef>
+              <a:spcAft>
+                <a:spcPts val="0"/>
+              </a:spcAft>
+              <a:buNone/>
+            </a:pPr>
+            <a:r>
+              <a:t/>
+            </a:r>
+            <a:endParaRPr sz="1200">
+              <a:solidFill>
+                <a:schemeClr val="dk1"/>
+              </a:solidFill>
+              <a:latin typeface="Calibri"/>
+              <a:ea typeface="Calibri"/>
+              <a:cs typeface="Calibri"/>
+              <a:sym typeface="Calibri"/>
+            </a:endParaRPr>
           </a:p>
           <a:p>
             <a:pPr indent="0" lvl="0" marL="0" rtl="0" algn="l">
@@ -5830,7 +5475,55 @@
                 <a:cs typeface="Calibri"/>
                 <a:sym typeface="Calibri"/>
               </a:rPr>
-              <a:t>print(score &gt;= pass_mark)</a:t>
+              <a:t># b)</a:t>
+            </a:r>
+            <a:endParaRPr/>
+          </a:p>
+          <a:p>
+            <a:pPr indent="0" lvl="0" marL="0" rtl="0" algn="l">
+              <a:spcBef>
+                <a:spcPts val="0"/>
+              </a:spcBef>
+              <a:spcAft>
+                <a:spcPts val="0"/>
+              </a:spcAft>
+              <a:buNone/>
+            </a:pPr>
+            <a:r>
+              <a:rPr lang="en" sz="1200">
+                <a:solidFill>
+                  <a:schemeClr val="dk1"/>
+                </a:solidFill>
+                <a:latin typeface="Calibri"/>
+                <a:ea typeface="Calibri"/>
+                <a:cs typeface="Calibri"/>
+                <a:sym typeface="Calibri"/>
+              </a:rPr>
+              <a:t>rearranged = date[8:] + "-" + date[5:7] + "-" + date[:4]</a:t>
+            </a:r>
+            <a:endParaRPr/>
+          </a:p>
+          <a:p>
+            <a:pPr indent="0" lvl="0" marL="0" rtl="0" algn="l">
+              <a:spcBef>
+                <a:spcPts val="0"/>
+              </a:spcBef>
+              <a:spcAft>
+                <a:spcPts val="0"/>
+              </a:spcAft>
+              <a:buNone/>
+            </a:pPr>
+            <a:r>
+              <a:rPr lang="en" sz="1200">
+                <a:solidFill>
+                  <a:schemeClr val="dk1"/>
+                </a:solidFill>
+                <a:latin typeface="Calibri"/>
+                <a:ea typeface="Calibri"/>
+                <a:cs typeface="Calibri"/>
+                <a:sym typeface="Calibri"/>
+              </a:rPr>
+              <a:t>print(rearranged)         # 12-07-2026</a:t>
             </a:r>
             <a:endParaRPr/>
           </a:p>
@@ -5838,7 +5531,7 @@
       </p:sp>
       <p:sp>
         <p:nvSpPr>
-          <p:cNvPr id="421" name="Google Shape;421;g3f4d91c0644_2_7:notes"/>
+          <p:cNvPr id="410" name="Google Shape;410;g3f803d8f749_0_877:notes"/>
           <p:cNvSpPr txBox="1"/>
           <p:nvPr>
             <p:ph idx="12" type="sldNum"/>
@@ -5887,12 +5580,12 @@
 </p:notes>
 </file>
 
-<file path=ppt/notesSlides/notesSlide34.xml><?xml version="1.0" encoding="utf-8"?>
+<file path=ppt/notesSlides/notesSlide33.xml><?xml version="1.0" encoding="utf-8"?>
 <p:notes xmlns:a="http://schemas.openxmlformats.org/drawingml/2006/main" xmlns:r="http://schemas.openxmlformats.org/officeDocument/2006/relationships" xmlns:mc="http://schemas.openxmlformats.org/markup-compatibility/2006" xmlns:mv="urn:schemas-microsoft-com:mac:vml" xmlns:p="http://schemas.openxmlformats.org/presentationml/2006/main" xmlns:c="http://schemas.openxmlformats.org/drawingml/2006/chart" xmlns:dgm="http://schemas.openxmlformats.org/drawingml/2006/diagram" xmlns:o="urn:schemas-microsoft-com:office:office" xmlns:v="urn:schemas-microsoft-com:vml" xmlns:pvml="urn:schemas-microsoft-com:office:powerpoint" xmlns:com="http://schemas.openxmlformats.org/drawingml/2006/compatibility" xmlns:p14="http://schemas.microsoft.com/office/powerpoint/2010/main" xmlns:p15="http://schemas.microsoft.com/office/powerpoint/2012/main" xmlns:ahyp="http://schemas.microsoft.com/office/drawing/2018/hyperlinkcolor" showMasterPhAnim="0" showMasterSp="0">
   <p:cSld>
     <p:spTree>
       <p:nvGrpSpPr>
-        <p:cNvPr id="428" name="Shape 428"/>
+        <p:cNvPr id="416" name="Shape 416"/>
         <p:cNvGrpSpPr/>
         <p:nvPr/>
       </p:nvGrpSpPr>
@@ -5906,7 +5599,106 @@
       </p:grpSpPr>
       <p:sp>
         <p:nvSpPr>
-          <p:cNvPr id="429" name="Google Shape;429;g3f4d91c0644_2_16:notes"/>
+          <p:cNvPr id="417" name="Google Shape;417;g3f4d91c0644_2_1:notes"/>
+          <p:cNvSpPr txBox="1"/>
+          <p:nvPr>
+            <p:ph idx="1" type="body"/>
+          </p:nvPr>
+        </p:nvSpPr>
+        <p:spPr>
+          <a:xfrm>
+            <a:off x="685800" y="3300413"/>
+            <a:ext cx="5486400" cy="2700600"/>
+          </a:xfrm>
+          <a:prstGeom prst="rect">
+            <a:avLst/>
+          </a:prstGeom>
+        </p:spPr>
+        <p:txBody>
+          <a:bodyPr anchorCtr="0" anchor="t" bIns="91425" lIns="91425" spcFirstLastPara="1" rIns="91425" wrap="square" tIns="91425">
+            <a:noAutofit/>
+          </a:bodyPr>
+          <a:lstStyle/>
+          <a:p>
+            <a:pPr indent="0" lvl="0" marL="0" rtl="0" algn="l">
+              <a:spcBef>
+                <a:spcPts val="0"/>
+              </a:spcBef>
+              <a:spcAft>
+                <a:spcPts val="0"/>
+              </a:spcAft>
+              <a:buNone/>
+            </a:pPr>
+            <a:r>
+              <a:t/>
+            </a:r>
+            <a:endParaRPr/>
+          </a:p>
+        </p:txBody>
+      </p:sp>
+      <p:sp>
+        <p:nvSpPr>
+          <p:cNvPr id="418" name="Google Shape;418;g3f4d91c0644_2_1:notes"/>
+          <p:cNvSpPr/>
+          <p:nvPr>
+            <p:ph idx="2" type="sldImg"/>
+          </p:nvPr>
+        </p:nvSpPr>
+        <p:spPr>
+          <a:xfrm>
+            <a:off x="685800" y="857250"/>
+            <a:ext cx="5486400" cy="2314500"/>
+          </a:xfrm>
+          <a:custGeom>
+            <a:rect b="b" l="l" r="r" t="t"/>
+            <a:pathLst>
+              <a:path extrusionOk="0" h="120000" w="120000">
+                <a:moveTo>
+                  <a:pt x="0" y="0"/>
+                </a:moveTo>
+                <a:lnTo>
+                  <a:pt x="120000" y="0"/>
+                </a:lnTo>
+                <a:lnTo>
+                  <a:pt x="120000" y="120000"/>
+                </a:lnTo>
+                <a:lnTo>
+                  <a:pt x="0" y="120000"/>
+                </a:lnTo>
+                <a:close/>
+              </a:path>
+            </a:pathLst>
+          </a:custGeom>
+        </p:spPr>
+      </p:sp>
+    </p:spTree>
+  </p:cSld>
+  <p:clrMapOvr>
+    <a:masterClrMapping/>
+  </p:clrMapOvr>
+</p:notes>
+</file>
+
+<file path=ppt/notesSlides/notesSlide34.xml><?xml version="1.0" encoding="utf-8"?>
+<p:notes xmlns:a="http://schemas.openxmlformats.org/drawingml/2006/main" xmlns:r="http://schemas.openxmlformats.org/officeDocument/2006/relationships" xmlns:mc="http://schemas.openxmlformats.org/markup-compatibility/2006" xmlns:mv="urn:schemas-microsoft-com:mac:vml" xmlns:p="http://schemas.openxmlformats.org/presentationml/2006/main" xmlns:c="http://schemas.openxmlformats.org/drawingml/2006/chart" xmlns:dgm="http://schemas.openxmlformats.org/drawingml/2006/diagram" xmlns:o="urn:schemas-microsoft-com:office:office" xmlns:v="urn:schemas-microsoft-com:vml" xmlns:pvml="urn:schemas-microsoft-com:office:powerpoint" xmlns:com="http://schemas.openxmlformats.org/drawingml/2006/compatibility" xmlns:p14="http://schemas.microsoft.com/office/powerpoint/2010/main" xmlns:p15="http://schemas.microsoft.com/office/powerpoint/2012/main" xmlns:ahyp="http://schemas.microsoft.com/office/drawing/2018/hyperlinkcolor" showMasterPhAnim="0" showMasterSp="0">
+  <p:cSld>
+    <p:spTree>
+      <p:nvGrpSpPr>
+        <p:cNvPr id="423" name="Shape 423"/>
+        <p:cNvGrpSpPr/>
+        <p:nvPr/>
+      </p:nvGrpSpPr>
+      <p:grpSpPr>
+        <a:xfrm>
+          <a:off x="0" y="0"/>
+          <a:ext cx="0" cy="0"/>
+          <a:chOff x="0" y="0"/>
+          <a:chExt cx="0" cy="0"/>
+        </a:xfrm>
+      </p:grpSpPr>
+      <p:sp>
+        <p:nvSpPr>
+          <p:cNvPr id="424" name="Google Shape;424;g3f4d91c0644_2_7:notes"/>
           <p:cNvSpPr/>
           <p:nvPr>
             <p:ph idx="2" type="sldImg"/>
@@ -5951,7 +5743,7 @@
       </p:sp>
       <p:sp>
         <p:nvSpPr>
-          <p:cNvPr id="430" name="Google Shape;430;g3f4d91c0644_2_16:notes"/>
+          <p:cNvPr id="425" name="Google Shape;425;g3f4d91c0644_2_7:notes"/>
           <p:cNvSpPr txBox="1"/>
           <p:nvPr>
             <p:ph idx="1" type="body"/>
@@ -5995,7 +5787,7 @@
                 <a:cs typeface="Calibri"/>
                 <a:sym typeface="Calibri"/>
               </a:rPr>
-              <a:t># Bug 1 fix</a:t>
+              <a:t>score = 72</a:t>
             </a:r>
             <a:endParaRPr/>
           </a:p>
@@ -6019,55 +5811,7 @@
                 <a:cs typeface="Calibri"/>
                 <a:sym typeface="Calibri"/>
               </a:rPr>
-              <a:t>number = 10</a:t>
-            </a:r>
-            <a:endParaRPr/>
-          </a:p>
-          <a:p>
-            <a:pPr indent="0" lvl="0" marL="0" rtl="0" algn="l">
-              <a:spcBef>
-                <a:spcPts val="0"/>
-              </a:spcBef>
-              <a:spcAft>
-                <a:spcPts val="0"/>
-              </a:spcAft>
-              <a:buNone/>
-            </a:pPr>
-            <a:r>
-              <a:rPr lang="en" sz="1200">
-                <a:solidFill>
-                  <a:schemeClr val="dk1"/>
-                </a:solidFill>
-                <a:latin typeface="Calibri"/>
-                <a:ea typeface="Calibri"/>
-                <a:cs typeface="Calibri"/>
-                <a:sym typeface="Calibri"/>
-              </a:rPr>
-              <a:t>text = "5"</a:t>
-            </a:r>
-            <a:endParaRPr/>
-          </a:p>
-          <a:p>
-            <a:pPr indent="0" lvl="0" marL="0" rtl="0" algn="l">
-              <a:spcBef>
-                <a:spcPts val="0"/>
-              </a:spcBef>
-              <a:spcAft>
-                <a:spcPts val="0"/>
-              </a:spcAft>
-              <a:buNone/>
-            </a:pPr>
-            <a:r>
-              <a:rPr lang="en" sz="1200">
-                <a:solidFill>
-                  <a:schemeClr val="dk1"/>
-                </a:solidFill>
-                <a:latin typeface="Calibri"/>
-                <a:ea typeface="Calibri"/>
-                <a:cs typeface="Calibri"/>
-                <a:sym typeface="Calibri"/>
-              </a:rPr>
-              <a:t>print(number &gt; int(text))</a:t>
+              <a:t>pass_mark = 50</a:t>
             </a:r>
             <a:endParaRPr/>
           </a:p>
@@ -6114,7 +5858,7 @@
                 <a:cs typeface="Calibri"/>
                 <a:sym typeface="Calibri"/>
               </a:rPr>
-              <a:t># Bug 2 fix</a:t>
+              <a:t>print(score &gt; pass_mark)</a:t>
             </a:r>
             <a:endParaRPr/>
           </a:p>
@@ -6138,7 +5882,7 @@
                 <a:cs typeface="Calibri"/>
                 <a:sym typeface="Calibri"/>
               </a:rPr>
-              <a:t>age = 18</a:t>
+              <a:t>print(score != 100)</a:t>
             </a:r>
             <a:endParaRPr/>
           </a:p>
@@ -6162,7 +5906,7 @@
                 <a:cs typeface="Calibri"/>
                 <a:sym typeface="Calibri"/>
               </a:rPr>
-              <a:t>if age == 18:</a:t>
+              <a:t>print(score == 72)</a:t>
             </a:r>
             <a:endParaRPr/>
           </a:p>
@@ -6186,7 +5930,7 @@
                 <a:cs typeface="Calibri"/>
                 <a:sym typeface="Calibri"/>
               </a:rPr>
-              <a:t>    print("adult")</a:t>
+              <a:t>print(score &gt;= pass_mark)</a:t>
             </a:r>
             <a:endParaRPr/>
           </a:p>
@@ -6194,7 +5938,7 @@
       </p:sp>
       <p:sp>
         <p:nvSpPr>
-          <p:cNvPr id="431" name="Google Shape;431;g3f4d91c0644_2_16:notes"/>
+          <p:cNvPr id="426" name="Google Shape;426;g3f4d91c0644_2_7:notes"/>
           <p:cNvSpPr txBox="1"/>
           <p:nvPr>
             <p:ph idx="12" type="sldNum"/>
@@ -6248,7 +5992,7 @@
   <p:cSld>
     <p:spTree>
       <p:nvGrpSpPr>
-        <p:cNvPr id="441" name="Shape 441"/>
+        <p:cNvPr id="433" name="Shape 433"/>
         <p:cNvGrpSpPr/>
         <p:nvPr/>
       </p:nvGrpSpPr>
@@ -6262,7 +6006,7 @@
       </p:grpSpPr>
       <p:sp>
         <p:nvSpPr>
-          <p:cNvPr id="442" name="Google Shape;442;g3f4d91c0644_2_28:notes"/>
+          <p:cNvPr id="434" name="Google Shape;434;g3f4d91c0644_2_16:notes"/>
           <p:cNvSpPr/>
           <p:nvPr>
             <p:ph idx="2" type="sldImg"/>
@@ -6307,7 +6051,7 @@
       </p:sp>
       <p:sp>
         <p:nvSpPr>
-          <p:cNvPr id="443" name="Google Shape;443;g3f4d91c0644_2_28:notes"/>
+          <p:cNvPr id="435" name="Google Shape;435;g3f4d91c0644_2_16:notes"/>
           <p:cNvSpPr txBox="1"/>
           <p:nvPr>
             <p:ph idx="1" type="body"/>
@@ -6351,7 +6095,7 @@
                 <a:cs typeface="Calibri"/>
                 <a:sym typeface="Calibri"/>
               </a:rPr>
-              <a:t>age = 20</a:t>
+              <a:t># Bug 1 fix</a:t>
             </a:r>
             <a:endParaRPr/>
           </a:p>
@@ -6375,7 +6119,7 @@
                 <a:cs typeface="Calibri"/>
                 <a:sym typeface="Calibri"/>
               </a:rPr>
-              <a:t>has_ticket = True</a:t>
+              <a:t>number = 10</a:t>
             </a:r>
             <a:endParaRPr/>
           </a:p>
@@ -6399,7 +6143,31 @@
                 <a:cs typeface="Calibri"/>
                 <a:sym typeface="Calibri"/>
               </a:rPr>
-              <a:t>is_vip = False</a:t>
+              <a:t>text = "5"</a:t>
+            </a:r>
+            <a:endParaRPr/>
+          </a:p>
+          <a:p>
+            <a:pPr indent="0" lvl="0" marL="0" rtl="0" algn="l">
+              <a:spcBef>
+                <a:spcPts val="0"/>
+              </a:spcBef>
+              <a:spcAft>
+                <a:spcPts val="0"/>
+              </a:spcAft>
+              <a:buNone/>
+            </a:pPr>
+            <a:r>
+              <a:rPr lang="en" sz="1200">
+                <a:solidFill>
+                  <a:schemeClr val="dk1"/>
+                </a:solidFill>
+                <a:latin typeface="Calibri"/>
+                <a:ea typeface="Calibri"/>
+                <a:cs typeface="Calibri"/>
+                <a:sym typeface="Calibri"/>
+              </a:rPr>
+              <a:t>print(number &gt; int(text))</a:t>
             </a:r>
             <a:endParaRPr/>
           </a:p>
@@ -6446,7 +6214,7 @@
                 <a:cs typeface="Calibri"/>
                 <a:sym typeface="Calibri"/>
               </a:rPr>
-              <a:t>can_enter = (age &gt;= 18) and has_ticket</a:t>
+              <a:t># Bug 2 fix</a:t>
             </a:r>
             <a:endParaRPr/>
           </a:p>
@@ -6470,7 +6238,7 @@
                 <a:cs typeface="Calibri"/>
                 <a:sym typeface="Calibri"/>
               </a:rPr>
-              <a:t>skip_line = is_vip or (age &gt;= 65)</a:t>
+              <a:t>age = 18</a:t>
             </a:r>
             <a:endParaRPr/>
           </a:p>
@@ -6494,7 +6262,244 @@
                 <a:cs typeface="Calibri"/>
                 <a:sym typeface="Calibri"/>
               </a:rPr>
-              <a:t>needs_id  = not is_vip</a:t>
+              <a:t>if age == 18:</a:t>
+            </a:r>
+            <a:endParaRPr/>
+          </a:p>
+          <a:p>
+            <a:pPr indent="0" lvl="0" marL="0" rtl="0" algn="l">
+              <a:spcBef>
+                <a:spcPts val="0"/>
+              </a:spcBef>
+              <a:spcAft>
+                <a:spcPts val="0"/>
+              </a:spcAft>
+              <a:buNone/>
+            </a:pPr>
+            <a:r>
+              <a:rPr lang="en" sz="1200">
+                <a:solidFill>
+                  <a:schemeClr val="dk1"/>
+                </a:solidFill>
+                <a:latin typeface="Calibri"/>
+                <a:ea typeface="Calibri"/>
+                <a:cs typeface="Calibri"/>
+                <a:sym typeface="Calibri"/>
+              </a:rPr>
+              <a:t>    print("adult")</a:t>
+            </a:r>
+            <a:endParaRPr/>
+          </a:p>
+        </p:txBody>
+      </p:sp>
+      <p:sp>
+        <p:nvSpPr>
+          <p:cNvPr id="436" name="Google Shape;436;g3f4d91c0644_2_16:notes"/>
+          <p:cNvSpPr txBox="1"/>
+          <p:nvPr>
+            <p:ph idx="12" type="sldNum"/>
+          </p:nvPr>
+        </p:nvSpPr>
+        <p:spPr>
+          <a:xfrm>
+            <a:off x="3884613" y="6513910"/>
+            <a:ext cx="2971800" cy="344100"/>
+          </a:xfrm>
+          <a:prstGeom prst="rect">
+            <a:avLst/>
+          </a:prstGeom>
+          <a:noFill/>
+          <a:ln>
+            <a:noFill/>
+          </a:ln>
+        </p:spPr>
+        <p:txBody>
+          <a:bodyPr anchorCtr="0" anchor="ctr" bIns="91425" lIns="91425" spcFirstLastPara="1" rIns="91425" wrap="square" tIns="91425">
+            <a:noAutofit/>
+          </a:bodyPr>
+          <a:lstStyle/>
+          <a:p>
+            <a:pPr indent="0" lvl="0" marL="0" rtl="0" algn="l">
+              <a:spcBef>
+                <a:spcPts val="0"/>
+              </a:spcBef>
+              <a:spcAft>
+                <a:spcPts val="0"/>
+              </a:spcAft>
+              <a:buNone/>
+            </a:pPr>
+            <a:r>
+              <a:t/>
+            </a:r>
+            <a:endParaRPr/>
+          </a:p>
+        </p:txBody>
+      </p:sp>
+    </p:spTree>
+  </p:cSld>
+  <p:clrMapOvr>
+    <a:masterClrMapping/>
+  </p:clrMapOvr>
+</p:notes>
+</file>
+
+<file path=ppt/notesSlides/notesSlide36.xml><?xml version="1.0" encoding="utf-8"?>
+<p:notes xmlns:a="http://schemas.openxmlformats.org/drawingml/2006/main" xmlns:r="http://schemas.openxmlformats.org/officeDocument/2006/relationships" xmlns:mc="http://schemas.openxmlformats.org/markup-compatibility/2006" xmlns:mv="urn:schemas-microsoft-com:mac:vml" xmlns:p="http://schemas.openxmlformats.org/presentationml/2006/main" xmlns:c="http://schemas.openxmlformats.org/drawingml/2006/chart" xmlns:dgm="http://schemas.openxmlformats.org/drawingml/2006/diagram" xmlns:o="urn:schemas-microsoft-com:office:office" xmlns:v="urn:schemas-microsoft-com:vml" xmlns:pvml="urn:schemas-microsoft-com:office:powerpoint" xmlns:com="http://schemas.openxmlformats.org/drawingml/2006/compatibility" xmlns:p14="http://schemas.microsoft.com/office/powerpoint/2010/main" xmlns:p15="http://schemas.microsoft.com/office/powerpoint/2012/main" xmlns:ahyp="http://schemas.microsoft.com/office/drawing/2018/hyperlinkcolor" showMasterPhAnim="0" showMasterSp="0">
+  <p:cSld>
+    <p:spTree>
+      <p:nvGrpSpPr>
+        <p:cNvPr id="446" name="Shape 446"/>
+        <p:cNvGrpSpPr/>
+        <p:nvPr/>
+      </p:nvGrpSpPr>
+      <p:grpSpPr>
+        <a:xfrm>
+          <a:off x="0" y="0"/>
+          <a:ext cx="0" cy="0"/>
+          <a:chOff x="0" y="0"/>
+          <a:chExt cx="0" cy="0"/>
+        </a:xfrm>
+      </p:grpSpPr>
+      <p:sp>
+        <p:nvSpPr>
+          <p:cNvPr id="447" name="Google Shape;447;g3f4d91c0644_2_28:notes"/>
+          <p:cNvSpPr/>
+          <p:nvPr>
+            <p:ph idx="2" type="sldImg"/>
+          </p:nvPr>
+        </p:nvSpPr>
+        <p:spPr>
+          <a:xfrm>
+            <a:off x="685800" y="857250"/>
+            <a:ext cx="5486400" cy="2314500"/>
+          </a:xfrm>
+          <a:custGeom>
+            <a:rect b="b" l="l" r="r" t="t"/>
+            <a:pathLst>
+              <a:path extrusionOk="0" h="120000" w="120000">
+                <a:moveTo>
+                  <a:pt x="0" y="0"/>
+                </a:moveTo>
+                <a:lnTo>
+                  <a:pt x="120000" y="0"/>
+                </a:lnTo>
+                <a:lnTo>
+                  <a:pt x="120000" y="120000"/>
+                </a:lnTo>
+                <a:lnTo>
+                  <a:pt x="0" y="120000"/>
+                </a:lnTo>
+                <a:close/>
+              </a:path>
+            </a:pathLst>
+          </a:custGeom>
+          <a:noFill/>
+          <a:ln cap="flat" cmpd="sng" w="12700">
+            <a:solidFill>
+              <a:srgbClr val="000000"/>
+            </a:solidFill>
+            <a:prstDash val="solid"/>
+            <a:round/>
+            <a:headEnd len="sm" w="sm" type="none"/>
+            <a:tailEnd len="sm" w="sm" type="none"/>
+          </a:ln>
+        </p:spPr>
+      </p:sp>
+      <p:sp>
+        <p:nvSpPr>
+          <p:cNvPr id="448" name="Google Shape;448;g3f4d91c0644_2_28:notes"/>
+          <p:cNvSpPr txBox="1"/>
+          <p:nvPr>
+            <p:ph idx="1" type="body"/>
+          </p:nvPr>
+        </p:nvSpPr>
+        <p:spPr>
+          <a:xfrm>
+            <a:off x="685800" y="3300413"/>
+            <a:ext cx="5486400" cy="2700600"/>
+          </a:xfrm>
+          <a:prstGeom prst="rect">
+            <a:avLst/>
+          </a:prstGeom>
+          <a:noFill/>
+          <a:ln>
+            <a:noFill/>
+          </a:ln>
+        </p:spPr>
+        <p:txBody>
+          <a:bodyPr anchorCtr="0" anchor="t" bIns="45700" lIns="91425" spcFirstLastPara="1" rIns="91425" wrap="square" tIns="45700">
+            <a:noAutofit/>
+          </a:bodyPr>
+          <a:lstStyle/>
+          <a:p>
+            <a:pPr indent="0" lvl="0" marL="0" rtl="0" algn="l">
+              <a:spcBef>
+                <a:spcPts val="0"/>
+              </a:spcBef>
+              <a:spcAft>
+                <a:spcPts val="0"/>
+              </a:spcAft>
+              <a:buNone/>
+            </a:pPr>
+            <a:r>
+              <a:rPr lang="en" sz="1200">
+                <a:solidFill>
+                  <a:schemeClr val="dk1"/>
+                </a:solidFill>
+                <a:latin typeface="Calibri"/>
+                <a:ea typeface="Calibri"/>
+                <a:cs typeface="Calibri"/>
+                <a:sym typeface="Calibri"/>
+              </a:rPr>
+              <a:t>age = 20</a:t>
+            </a:r>
+            <a:endParaRPr/>
+          </a:p>
+          <a:p>
+            <a:pPr indent="0" lvl="0" marL="0" rtl="0" algn="l">
+              <a:spcBef>
+                <a:spcPts val="0"/>
+              </a:spcBef>
+              <a:spcAft>
+                <a:spcPts val="0"/>
+              </a:spcAft>
+              <a:buNone/>
+            </a:pPr>
+            <a:r>
+              <a:rPr lang="en" sz="1200">
+                <a:solidFill>
+                  <a:schemeClr val="dk1"/>
+                </a:solidFill>
+                <a:latin typeface="Calibri"/>
+                <a:ea typeface="Calibri"/>
+                <a:cs typeface="Calibri"/>
+                <a:sym typeface="Calibri"/>
+              </a:rPr>
+              <a:t>has_ticket = True</a:t>
+            </a:r>
+            <a:endParaRPr/>
+          </a:p>
+          <a:p>
+            <a:pPr indent="0" lvl="0" marL="0" rtl="0" algn="l">
+              <a:spcBef>
+                <a:spcPts val="0"/>
+              </a:spcBef>
+              <a:spcAft>
+                <a:spcPts val="0"/>
+              </a:spcAft>
+              <a:buNone/>
+            </a:pPr>
+            <a:r>
+              <a:rPr lang="en" sz="1200">
+                <a:solidFill>
+                  <a:schemeClr val="dk1"/>
+                </a:solidFill>
+                <a:latin typeface="Calibri"/>
+                <a:ea typeface="Calibri"/>
+                <a:cs typeface="Calibri"/>
+                <a:sym typeface="Calibri"/>
+              </a:rPr>
+              <a:t>is_vip = False</a:t>
             </a:r>
             <a:endParaRPr/>
           </a:p>
@@ -6541,6 +6546,101 @@
                 <a:cs typeface="Calibri"/>
                 <a:sym typeface="Calibri"/>
               </a:rPr>
+              <a:t>can_enter = (age &gt;= 18) and has_ticket</a:t>
+            </a:r>
+            <a:endParaRPr/>
+          </a:p>
+          <a:p>
+            <a:pPr indent="0" lvl="0" marL="0" rtl="0" algn="l">
+              <a:spcBef>
+                <a:spcPts val="0"/>
+              </a:spcBef>
+              <a:spcAft>
+                <a:spcPts val="0"/>
+              </a:spcAft>
+              <a:buNone/>
+            </a:pPr>
+            <a:r>
+              <a:rPr lang="en" sz="1200">
+                <a:solidFill>
+                  <a:schemeClr val="dk1"/>
+                </a:solidFill>
+                <a:latin typeface="Calibri"/>
+                <a:ea typeface="Calibri"/>
+                <a:cs typeface="Calibri"/>
+                <a:sym typeface="Calibri"/>
+              </a:rPr>
+              <a:t>skip_line = is_vip or (age &gt;= 65)</a:t>
+            </a:r>
+            <a:endParaRPr/>
+          </a:p>
+          <a:p>
+            <a:pPr indent="0" lvl="0" marL="0" rtl="0" algn="l">
+              <a:spcBef>
+                <a:spcPts val="0"/>
+              </a:spcBef>
+              <a:spcAft>
+                <a:spcPts val="0"/>
+              </a:spcAft>
+              <a:buNone/>
+            </a:pPr>
+            <a:r>
+              <a:rPr lang="en" sz="1200">
+                <a:solidFill>
+                  <a:schemeClr val="dk1"/>
+                </a:solidFill>
+                <a:latin typeface="Calibri"/>
+                <a:ea typeface="Calibri"/>
+                <a:cs typeface="Calibri"/>
+                <a:sym typeface="Calibri"/>
+              </a:rPr>
+              <a:t>needs_id  = not is_vip</a:t>
+            </a:r>
+            <a:endParaRPr/>
+          </a:p>
+          <a:p>
+            <a:pPr indent="0" lvl="0" marL="0" rtl="0" algn="l">
+              <a:spcBef>
+                <a:spcPts val="0"/>
+              </a:spcBef>
+              <a:spcAft>
+                <a:spcPts val="0"/>
+              </a:spcAft>
+              <a:buNone/>
+            </a:pPr>
+            <a:r>
+              <a:t/>
+            </a:r>
+            <a:endParaRPr sz="1200">
+              <a:solidFill>
+                <a:schemeClr val="dk1"/>
+              </a:solidFill>
+              <a:latin typeface="Calibri"/>
+              <a:ea typeface="Calibri"/>
+              <a:cs typeface="Calibri"/>
+              <a:sym typeface="Calibri"/>
+            </a:endParaRPr>
+          </a:p>
+          <a:p>
+            <a:pPr indent="0" lvl="0" marL="0" rtl="0" algn="l">
+              <a:spcBef>
+                <a:spcPts val="0"/>
+              </a:spcBef>
+              <a:spcAft>
+                <a:spcPts val="0"/>
+              </a:spcAft>
+              <a:buNone/>
+            </a:pPr>
+            <a:r>
+              <a:rPr lang="en" sz="1200">
+                <a:solidFill>
+                  <a:schemeClr val="dk1"/>
+                </a:solidFill>
+                <a:latin typeface="Calibri"/>
+                <a:ea typeface="Calibri"/>
+                <a:cs typeface="Calibri"/>
+                <a:sym typeface="Calibri"/>
+              </a:rPr>
               <a:t>print(can_enter, skip_line, needs_id)</a:t>
             </a:r>
             <a:endParaRPr/>
@@ -6549,7 +6649,7 @@
       </p:sp>
       <p:sp>
         <p:nvSpPr>
-          <p:cNvPr id="444" name="Google Shape;444;g3f4d91c0644_2_28:notes"/>
+          <p:cNvPr id="449" name="Google Shape;449;g3f4d91c0644_2_28:notes"/>
           <p:cNvSpPr txBox="1"/>
           <p:nvPr>
             <p:ph idx="12" type="sldNum"/>
@@ -24108,7 +24208,7 @@
               <a:buNone/>
             </a:pPr>
             <a:r>
-              <a:rPr b="1" lang="en" sz="1900">
+              <a:rPr b="1" lang="en" sz="1400">
                 <a:solidFill>
                   <a:srgbClr val="D84568"/>
                 </a:solidFill>
@@ -24116,14 +24216,14 @@
               <a:t>Comparison on String </a:t>
             </a:r>
             <a:r>
-              <a:rPr b="1" lang="en" sz="1900">
+              <a:rPr b="1" lang="en" sz="1400">
                 <a:solidFill>
                   <a:srgbClr val="D84568"/>
                 </a:solidFill>
               </a:rPr>
               <a:t>Data Type</a:t>
             </a:r>
-            <a:endParaRPr sz="1900"/>
+            <a:endParaRPr sz="1400"/>
           </a:p>
         </p:txBody>
       </p:sp>
@@ -24507,6 +24607,71 @@
         </p:nvSpPr>
         <p:spPr>
           <a:xfrm>
+            <a:off x="598100" y="2152347"/>
+            <a:ext cx="8222100" cy="838800"/>
+          </a:xfrm>
+          <a:prstGeom prst="rect">
+            <a:avLst/>
+          </a:prstGeom>
+        </p:spPr>
+        <p:txBody>
+          <a:bodyPr anchorCtr="0" anchor="ctr" bIns="91425" lIns="91425" spcFirstLastPara="1" rIns="91425" wrap="square" tIns="91425">
+            <a:normAutofit/>
+          </a:bodyPr>
+          <a:lstStyle/>
+          <a:p>
+            <a:pPr indent="0" lvl="0" marL="0" rtl="0" algn="l">
+              <a:spcBef>
+                <a:spcPts val="0"/>
+              </a:spcBef>
+              <a:spcAft>
+                <a:spcPts val="0"/>
+              </a:spcAft>
+              <a:buNone/>
+            </a:pPr>
+            <a:r>
+              <a:rPr lang="en"/>
+              <a:t>Logical Operators</a:t>
+            </a:r>
+            <a:endParaRPr/>
+          </a:p>
+        </p:txBody>
+      </p:sp>
+    </p:spTree>
+  </p:cSld>
+  <p:clrMapOvr>
+    <a:masterClrMapping/>
+  </p:clrMapOvr>
+</p:sld>
+</file>
+
+<file path=ppt/slides/slide17.xml><?xml version="1.0" encoding="utf-8"?>
+<p:sld xmlns:a="http://schemas.openxmlformats.org/drawingml/2006/main" xmlns:r="http://schemas.openxmlformats.org/officeDocument/2006/relationships" xmlns:mc="http://schemas.openxmlformats.org/markup-compatibility/2006" xmlns:mv="urn:schemas-microsoft-com:mac:vml" xmlns:p="http://schemas.openxmlformats.org/presentationml/2006/main" xmlns:c="http://schemas.openxmlformats.org/drawingml/2006/chart" xmlns:dgm="http://schemas.openxmlformats.org/drawingml/2006/diagram" xmlns:o="urn:schemas-microsoft-com:office:office" xmlns:v="urn:schemas-microsoft-com:vml" xmlns:pvml="urn:schemas-microsoft-com:office:powerpoint" xmlns:com="http://schemas.openxmlformats.org/drawingml/2006/compatibility" xmlns:p14="http://schemas.microsoft.com/office/powerpoint/2010/main" xmlns:p15="http://schemas.microsoft.com/office/powerpoint/2012/main" xmlns:ahyp="http://schemas.microsoft.com/office/drawing/2018/hyperlinkcolor">
+  <p:cSld>
+    <p:spTree>
+      <p:nvGrpSpPr>
+        <p:cNvPr id="273" name="Shape 273"/>
+        <p:cNvGrpSpPr/>
+        <p:nvPr/>
+      </p:nvGrpSpPr>
+      <p:grpSpPr>
+        <a:xfrm>
+          <a:off x="0" y="0"/>
+          <a:ext cx="0" cy="0"/>
+          <a:chOff x="0" y="0"/>
+          <a:chExt cx="0" cy="0"/>
+        </a:xfrm>
+      </p:grpSpPr>
+      <p:sp>
+        <p:nvSpPr>
+          <p:cNvPr id="274" name="Google Shape;274;p35"/>
+          <p:cNvSpPr txBox="1"/>
+          <p:nvPr>
+            <p:ph type="title"/>
+          </p:nvPr>
+        </p:nvSpPr>
+        <p:spPr>
+          <a:xfrm>
             <a:off x="311700" y="181400"/>
             <a:ext cx="8520600" cy="607800"/>
           </a:xfrm>
@@ -24531,7 +24696,7 @@
             </a:pPr>
             <a:r>
               <a:rPr lang="en"/>
-              <a:t>2.3 Logical Operators</a:t>
+              <a:t>Logical Operators</a:t>
             </a:r>
             <a:endParaRPr/>
           </a:p>
@@ -24539,7 +24704,7 @@
       </p:sp>
       <p:sp>
         <p:nvSpPr>
-          <p:cNvPr id="270" name="Google Shape;270;p34"/>
+          <p:cNvPr id="275" name="Google Shape;275;p35"/>
           <p:cNvSpPr txBox="1"/>
           <p:nvPr>
             <p:ph idx="1" type="body"/>
@@ -24620,12 +24785,12 @@
 </p:sld>
 </file>
 
-<file path=ppt/slides/slide17.xml><?xml version="1.0" encoding="utf-8"?>
+<file path=ppt/slides/slide18.xml><?xml version="1.0" encoding="utf-8"?>
 <p:sld xmlns:a="http://schemas.openxmlformats.org/drawingml/2006/main" xmlns:r="http://schemas.openxmlformats.org/officeDocument/2006/relationships" xmlns:mc="http://schemas.openxmlformats.org/markup-compatibility/2006" xmlns:mv="urn:schemas-microsoft-com:mac:vml" xmlns:p="http://schemas.openxmlformats.org/presentationml/2006/main" xmlns:c="http://schemas.openxmlformats.org/drawingml/2006/chart" xmlns:dgm="http://schemas.openxmlformats.org/drawingml/2006/diagram" xmlns:o="urn:schemas-microsoft-com:office:office" xmlns:v="urn:schemas-microsoft-com:vml" xmlns:pvml="urn:schemas-microsoft-com:office:powerpoint" xmlns:com="http://schemas.openxmlformats.org/drawingml/2006/compatibility" xmlns:p14="http://schemas.microsoft.com/office/powerpoint/2010/main" xmlns:p15="http://schemas.microsoft.com/office/powerpoint/2012/main" xmlns:ahyp="http://schemas.microsoft.com/office/drawing/2018/hyperlinkcolor">
   <p:cSld>
     <p:spTree>
       <p:nvGrpSpPr>
-        <p:cNvPr id="274" name="Shape 274"/>
+        <p:cNvPr id="279" name="Shape 279"/>
         <p:cNvGrpSpPr/>
         <p:nvPr/>
       </p:nvGrpSpPr>
@@ -24639,7 +24804,7 @@
       </p:grpSpPr>
       <p:sp>
         <p:nvSpPr>
-          <p:cNvPr id="275" name="Google Shape;275;p35"/>
+          <p:cNvPr id="280" name="Google Shape;280;p36"/>
           <p:cNvSpPr txBox="1"/>
           <p:nvPr>
             <p:ph type="title"/>
@@ -24696,7 +24861,7 @@
       </p:sp>
       <p:sp>
         <p:nvSpPr>
-          <p:cNvPr id="276" name="Google Shape;276;p35"/>
+          <p:cNvPr id="281" name="Google Shape;281;p36"/>
           <p:cNvSpPr txBox="1"/>
           <p:nvPr>
             <p:ph idx="1" type="subTitle"/>
@@ -24735,7 +24900,7 @@
       </p:sp>
       <p:sp>
         <p:nvSpPr>
-          <p:cNvPr id="277" name="Google Shape;277;p35"/>
+          <p:cNvPr id="282" name="Google Shape;282;p36"/>
           <p:cNvSpPr txBox="1"/>
           <p:nvPr>
             <p:ph idx="2" type="title"/>
@@ -24792,7 +24957,7 @@
       </p:sp>
       <p:sp>
         <p:nvSpPr>
-          <p:cNvPr id="278" name="Google Shape;278;p35"/>
+          <p:cNvPr id="283" name="Google Shape;283;p36"/>
           <p:cNvSpPr txBox="1"/>
           <p:nvPr>
             <p:ph idx="3" type="subTitle"/>
@@ -24831,7 +24996,7 @@
       </p:sp>
       <p:pic>
         <p:nvPicPr>
-          <p:cNvPr id="279" name="Google Shape;279;p35"/>
+          <p:cNvPr id="284" name="Google Shape;284;p36"/>
           <p:cNvPicPr preferRelativeResize="0"/>
           <p:nvPr/>
         </p:nvPicPr>
@@ -24859,7 +25024,7 @@
       </p:pic>
       <p:pic>
         <p:nvPicPr>
-          <p:cNvPr id="280" name="Google Shape;280;p35"/>
+          <p:cNvPr id="285" name="Google Shape;285;p36"/>
           <p:cNvPicPr preferRelativeResize="0"/>
           <p:nvPr/>
         </p:nvPicPr>
@@ -24893,12 +25058,12 @@
 </p:sld>
 </file>
 
-<file path=ppt/slides/slide18.xml><?xml version="1.0" encoding="utf-8"?>
+<file path=ppt/slides/slide19.xml><?xml version="1.0" encoding="utf-8"?>
 <p:sld xmlns:a="http://schemas.openxmlformats.org/drawingml/2006/main" xmlns:r="http://schemas.openxmlformats.org/officeDocument/2006/relationships" xmlns:mc="http://schemas.openxmlformats.org/markup-compatibility/2006" xmlns:mv="urn:schemas-microsoft-com:mac:vml" xmlns:p="http://schemas.openxmlformats.org/presentationml/2006/main" xmlns:c="http://schemas.openxmlformats.org/drawingml/2006/chart" xmlns:dgm="http://schemas.openxmlformats.org/drawingml/2006/diagram" xmlns:o="urn:schemas-microsoft-com:office:office" xmlns:v="urn:schemas-microsoft-com:vml" xmlns:pvml="urn:schemas-microsoft-com:office:powerpoint" xmlns:com="http://schemas.openxmlformats.org/drawingml/2006/compatibility" xmlns:p14="http://schemas.microsoft.com/office/powerpoint/2010/main" xmlns:p15="http://schemas.microsoft.com/office/powerpoint/2012/main" xmlns:ahyp="http://schemas.microsoft.com/office/drawing/2018/hyperlinkcolor">
   <p:cSld>
     <p:spTree>
       <p:nvGrpSpPr>
-        <p:cNvPr id="284" name="Shape 284"/>
+        <p:cNvPr id="289" name="Shape 289"/>
         <p:cNvGrpSpPr/>
         <p:nvPr/>
       </p:nvGrpSpPr>
@@ -24912,7 +25077,7 @@
       </p:grpSpPr>
       <p:sp>
         <p:nvSpPr>
-          <p:cNvPr id="285" name="Google Shape;285;p36"/>
+          <p:cNvPr id="290" name="Google Shape;290;p37"/>
           <p:cNvSpPr txBox="1"/>
           <p:nvPr>
             <p:ph type="title"/>
@@ -24952,7 +25117,7 @@
       </p:sp>
       <p:sp>
         <p:nvSpPr>
-          <p:cNvPr id="286" name="Google Shape;286;p36"/>
+          <p:cNvPr id="291" name="Google Shape;291;p37"/>
           <p:cNvSpPr txBox="1"/>
           <p:nvPr>
             <p:ph idx="1" type="body"/>
@@ -24991,7 +25156,7 @@
       </p:sp>
       <p:pic>
         <p:nvPicPr>
-          <p:cNvPr id="287" name="Google Shape;287;p36"/>
+          <p:cNvPr id="292" name="Google Shape;292;p37"/>
           <p:cNvPicPr preferRelativeResize="0"/>
           <p:nvPr/>
         </p:nvPicPr>
@@ -25017,79 +25182,6 @@
           </a:ln>
         </p:spPr>
       </p:pic>
-    </p:spTree>
-  </p:cSld>
-  <p:clrMapOvr>
-    <a:masterClrMapping/>
-  </p:clrMapOvr>
-</p:sld>
-</file>
-
-<file path=ppt/slides/slide19.xml><?xml version="1.0" encoding="utf-8"?>
-<p:sld xmlns:a="http://schemas.openxmlformats.org/drawingml/2006/main" xmlns:r="http://schemas.openxmlformats.org/officeDocument/2006/relationships" xmlns:mc="http://schemas.openxmlformats.org/markup-compatibility/2006" xmlns:mv="urn:schemas-microsoft-com:mac:vml" xmlns:p="http://schemas.openxmlformats.org/presentationml/2006/main" xmlns:c="http://schemas.openxmlformats.org/drawingml/2006/chart" xmlns:dgm="http://schemas.openxmlformats.org/drawingml/2006/diagram" xmlns:o="urn:schemas-microsoft-com:office:office" xmlns:v="urn:schemas-microsoft-com:vml" xmlns:pvml="urn:schemas-microsoft-com:office:powerpoint" xmlns:com="http://schemas.openxmlformats.org/drawingml/2006/compatibility" xmlns:p14="http://schemas.microsoft.com/office/powerpoint/2010/main" xmlns:p15="http://schemas.microsoft.com/office/powerpoint/2012/main" xmlns:ahyp="http://schemas.microsoft.com/office/drawing/2018/hyperlinkcolor">
-  <p:cSld>
-    <p:spTree>
-      <p:nvGrpSpPr>
-        <p:cNvPr id="291" name="Shape 291"/>
-        <p:cNvGrpSpPr/>
-        <p:nvPr/>
-      </p:nvGrpSpPr>
-      <p:grpSpPr>
-        <a:xfrm>
-          <a:off x="0" y="0"/>
-          <a:ext cx="0" cy="0"/>
-          <a:chOff x="0" y="0"/>
-          <a:chExt cx="0" cy="0"/>
-        </a:xfrm>
-      </p:grpSpPr>
-      <p:sp>
-        <p:nvSpPr>
-          <p:cNvPr id="292" name="Google Shape;292;p37"/>
-          <p:cNvSpPr txBox="1"/>
-          <p:nvPr>
-            <p:ph type="title"/>
-          </p:nvPr>
-        </p:nvSpPr>
-        <p:spPr>
-          <a:xfrm>
-            <a:off x="598100" y="2152347"/>
-            <a:ext cx="8222100" cy="838800"/>
-          </a:xfrm>
-          <a:prstGeom prst="rect">
-            <a:avLst/>
-          </a:prstGeom>
-        </p:spPr>
-        <p:txBody>
-          <a:bodyPr anchorCtr="0" anchor="ctr" bIns="91425" lIns="91425" spcFirstLastPara="1" rIns="91425" wrap="square" tIns="91425">
-            <a:normAutofit/>
-          </a:bodyPr>
-          <a:lstStyle/>
-          <a:p>
-            <a:pPr indent="0" lvl="0" marL="0" rtl="0" algn="l">
-              <a:spcBef>
-                <a:spcPts val="0"/>
-              </a:spcBef>
-              <a:spcAft>
-                <a:spcPts val="0"/>
-              </a:spcAft>
-              <a:buNone/>
-            </a:pPr>
-            <a:r>
-              <a:rPr b="1" lang="en">
-                <a:solidFill>
-                  <a:schemeClr val="accent5"/>
-                </a:solidFill>
-              </a:rPr>
-              <a:t>TRY IT YOURSELF</a:t>
-            </a:r>
-            <a:endParaRPr b="1">
-              <a:solidFill>
-                <a:schemeClr val="accent5"/>
-              </a:solidFill>
-            </a:endParaRPr>
-          </a:p>
-        </p:txBody>
-      </p:sp>
     </p:spTree>
   </p:cSld>
   <p:clrMapOvr>
@@ -25285,6 +25377,79 @@
         </p:nvSpPr>
         <p:spPr>
           <a:xfrm>
+            <a:off x="598100" y="2152347"/>
+            <a:ext cx="8222100" cy="838800"/>
+          </a:xfrm>
+          <a:prstGeom prst="rect">
+            <a:avLst/>
+          </a:prstGeom>
+        </p:spPr>
+        <p:txBody>
+          <a:bodyPr anchorCtr="0" anchor="ctr" bIns="91425" lIns="91425" spcFirstLastPara="1" rIns="91425" wrap="square" tIns="91425">
+            <a:normAutofit/>
+          </a:bodyPr>
+          <a:lstStyle/>
+          <a:p>
+            <a:pPr indent="0" lvl="0" marL="0" rtl="0" algn="l">
+              <a:spcBef>
+                <a:spcPts val="0"/>
+              </a:spcBef>
+              <a:spcAft>
+                <a:spcPts val="0"/>
+              </a:spcAft>
+              <a:buNone/>
+            </a:pPr>
+            <a:r>
+              <a:rPr b="1" lang="en">
+                <a:solidFill>
+                  <a:schemeClr val="accent5"/>
+                </a:solidFill>
+              </a:rPr>
+              <a:t>TRY IT YOURSELF</a:t>
+            </a:r>
+            <a:endParaRPr b="1">
+              <a:solidFill>
+                <a:schemeClr val="accent5"/>
+              </a:solidFill>
+            </a:endParaRPr>
+          </a:p>
+        </p:txBody>
+      </p:sp>
+    </p:spTree>
+  </p:cSld>
+  <p:clrMapOvr>
+    <a:masterClrMapping/>
+  </p:clrMapOvr>
+</p:sld>
+</file>
+
+<file path=ppt/slides/slide21.xml><?xml version="1.0" encoding="utf-8"?>
+<p:sld xmlns:a="http://schemas.openxmlformats.org/drawingml/2006/main" xmlns:r="http://schemas.openxmlformats.org/officeDocument/2006/relationships" xmlns:mc="http://schemas.openxmlformats.org/markup-compatibility/2006" xmlns:mv="urn:schemas-microsoft-com:mac:vml" xmlns:p="http://schemas.openxmlformats.org/presentationml/2006/main" xmlns:c="http://schemas.openxmlformats.org/drawingml/2006/chart" xmlns:dgm="http://schemas.openxmlformats.org/drawingml/2006/diagram" xmlns:o="urn:schemas-microsoft-com:office:office" xmlns:v="urn:schemas-microsoft-com:vml" xmlns:pvml="urn:schemas-microsoft-com:office:powerpoint" xmlns:com="http://schemas.openxmlformats.org/drawingml/2006/compatibility" xmlns:p14="http://schemas.microsoft.com/office/powerpoint/2010/main" xmlns:p15="http://schemas.microsoft.com/office/powerpoint/2012/main" xmlns:ahyp="http://schemas.microsoft.com/office/drawing/2018/hyperlinkcolor">
+  <p:cSld>
+    <p:spTree>
+      <p:nvGrpSpPr>
+        <p:cNvPr id="301" name="Shape 301"/>
+        <p:cNvGrpSpPr/>
+        <p:nvPr/>
+      </p:nvGrpSpPr>
+      <p:grpSpPr>
+        <a:xfrm>
+          <a:off x="0" y="0"/>
+          <a:ext cx="0" cy="0"/>
+          <a:chOff x="0" y="0"/>
+          <a:chExt cx="0" cy="0"/>
+        </a:xfrm>
+      </p:grpSpPr>
+      <p:sp>
+        <p:nvSpPr>
+          <p:cNvPr id="302" name="Google Shape;302;p39"/>
+          <p:cNvSpPr txBox="1"/>
+          <p:nvPr>
+            <p:ph type="title"/>
+          </p:nvPr>
+        </p:nvSpPr>
+        <p:spPr>
+          <a:xfrm>
             <a:off x="617220" y="1988820"/>
             <a:ext cx="7543800" cy="822900"/>
           </a:xfrm>
@@ -25334,7 +25499,7 @@
       </p:sp>
       <p:sp>
         <p:nvSpPr>
-          <p:cNvPr id="298" name="Google Shape;298;p38"/>
+          <p:cNvPr id="303" name="Google Shape;303;p39"/>
           <p:cNvSpPr txBox="1"/>
           <p:nvPr>
             <p:ph idx="1" type="body"/>
@@ -25384,12 +25549,12 @@
 </p:sld>
 </file>
 
-<file path=ppt/slides/slide21.xml><?xml version="1.0" encoding="utf-8"?>
+<file path=ppt/slides/slide22.xml><?xml version="1.0" encoding="utf-8"?>
 <p:sld xmlns:a="http://schemas.openxmlformats.org/drawingml/2006/main" xmlns:r="http://schemas.openxmlformats.org/officeDocument/2006/relationships" xmlns:mc="http://schemas.openxmlformats.org/markup-compatibility/2006" xmlns:mv="urn:schemas-microsoft-com:mac:vml" xmlns:p="http://schemas.openxmlformats.org/presentationml/2006/main" xmlns:c="http://schemas.openxmlformats.org/drawingml/2006/chart" xmlns:dgm="http://schemas.openxmlformats.org/drawingml/2006/diagram" xmlns:o="urn:schemas-microsoft-com:office:office" xmlns:v="urn:schemas-microsoft-com:vml" xmlns:pvml="urn:schemas-microsoft-com:office:powerpoint" xmlns:com="http://schemas.openxmlformats.org/drawingml/2006/compatibility" xmlns:p14="http://schemas.microsoft.com/office/powerpoint/2010/main" xmlns:p15="http://schemas.microsoft.com/office/powerpoint/2012/main" xmlns:ahyp="http://schemas.microsoft.com/office/drawing/2018/hyperlinkcolor">
   <p:cSld>
     <p:spTree>
       <p:nvGrpSpPr>
-        <p:cNvPr id="303" name="Shape 303"/>
+        <p:cNvPr id="308" name="Shape 308"/>
         <p:cNvGrpSpPr/>
         <p:nvPr/>
       </p:nvGrpSpPr>
@@ -25403,7 +25568,7 @@
       </p:grpSpPr>
       <p:sp>
         <p:nvSpPr>
-          <p:cNvPr id="304" name="Google Shape;304;p39"/>
+          <p:cNvPr id="309" name="Google Shape;309;p40"/>
           <p:cNvSpPr txBox="1"/>
           <p:nvPr>
             <p:ph type="title"/>
@@ -25452,7 +25617,7 @@
       </p:sp>
       <p:sp>
         <p:nvSpPr>
-          <p:cNvPr id="305" name="Google Shape;305;p39"/>
+          <p:cNvPr id="310" name="Google Shape;310;p40"/>
           <p:cNvSpPr txBox="1"/>
           <p:nvPr>
             <p:ph idx="3" type="body"/>
@@ -25508,7 +25673,7 @@
       </p:sp>
       <p:sp>
         <p:nvSpPr>
-          <p:cNvPr id="306" name="Google Shape;306;p39"/>
+          <p:cNvPr id="311" name="Google Shape;311;p40"/>
           <p:cNvSpPr txBox="1"/>
           <p:nvPr>
             <p:ph idx="4" type="body"/>
@@ -25764,7 +25929,7 @@
       </p:sp>
       <p:pic>
         <p:nvPicPr>
-          <p:cNvPr id="307" name="Google Shape;307;p39"/>
+          <p:cNvPr id="312" name="Google Shape;312;p40"/>
           <p:cNvPicPr preferRelativeResize="0"/>
           <p:nvPr/>
         </p:nvPicPr>
@@ -25805,12 +25970,12 @@
 </p:sld>
 </file>
 
-<file path=ppt/slides/slide22.xml><?xml version="1.0" encoding="utf-8"?>
+<file path=ppt/slides/slide23.xml><?xml version="1.0" encoding="utf-8"?>
 <p:sld xmlns:a="http://schemas.openxmlformats.org/drawingml/2006/main" xmlns:r="http://schemas.openxmlformats.org/officeDocument/2006/relationships" xmlns:mc="http://schemas.openxmlformats.org/markup-compatibility/2006" xmlns:mv="urn:schemas-microsoft-com:mac:vml" xmlns:p="http://schemas.openxmlformats.org/presentationml/2006/main" xmlns:c="http://schemas.openxmlformats.org/drawingml/2006/chart" xmlns:dgm="http://schemas.openxmlformats.org/drawingml/2006/diagram" xmlns:o="urn:schemas-microsoft-com:office:office" xmlns:v="urn:schemas-microsoft-com:vml" xmlns:pvml="urn:schemas-microsoft-com:office:powerpoint" xmlns:com="http://schemas.openxmlformats.org/drawingml/2006/compatibility" xmlns:p14="http://schemas.microsoft.com/office/powerpoint/2010/main" xmlns:p15="http://schemas.microsoft.com/office/powerpoint/2012/main" xmlns:ahyp="http://schemas.microsoft.com/office/drawing/2018/hyperlinkcolor">
   <p:cSld>
     <p:spTree>
       <p:nvGrpSpPr>
-        <p:cNvPr id="312" name="Shape 312"/>
+        <p:cNvPr id="317" name="Shape 317"/>
         <p:cNvGrpSpPr/>
         <p:nvPr/>
       </p:nvGrpSpPr>
@@ -25824,7 +25989,7 @@
       </p:grpSpPr>
       <p:sp>
         <p:nvSpPr>
-          <p:cNvPr id="313" name="Google Shape;313;p40"/>
+          <p:cNvPr id="318" name="Google Shape;318;p41"/>
           <p:cNvSpPr txBox="1"/>
           <p:nvPr>
             <p:ph idx="1" type="body"/>
@@ -25880,7 +26045,7 @@
       </p:sp>
       <p:sp>
         <p:nvSpPr>
-          <p:cNvPr id="314" name="Google Shape;314;p40"/>
+          <p:cNvPr id="319" name="Google Shape;319;p41"/>
           <p:cNvSpPr txBox="1"/>
           <p:nvPr>
             <p:ph type="title"/>
@@ -25937,7 +26102,7 @@
       </p:sp>
       <p:sp>
         <p:nvSpPr>
-          <p:cNvPr id="315" name="Google Shape;315;p40"/>
+          <p:cNvPr id="320" name="Google Shape;320;p41"/>
           <p:cNvSpPr txBox="1"/>
           <p:nvPr>
             <p:ph idx="3" type="body"/>
@@ -25993,7 +26158,7 @@
       </p:sp>
       <p:sp>
         <p:nvSpPr>
-          <p:cNvPr id="316" name="Google Shape;316;p40"/>
+          <p:cNvPr id="321" name="Google Shape;321;p41"/>
           <p:cNvSpPr txBox="1"/>
           <p:nvPr>
             <p:ph idx="4" type="body"/>
@@ -26049,7 +26214,7 @@
       </p:sp>
       <p:sp>
         <p:nvSpPr>
-          <p:cNvPr id="317" name="Google Shape;317;p40"/>
+          <p:cNvPr id="322" name="Google Shape;322;p41"/>
           <p:cNvSpPr txBox="1"/>
           <p:nvPr>
             <p:ph idx="5" type="body"/>
@@ -26105,7 +26270,7 @@
       </p:sp>
       <p:sp>
         <p:nvSpPr>
-          <p:cNvPr id="318" name="Google Shape;318;p40"/>
+          <p:cNvPr id="323" name="Google Shape;323;p41"/>
           <p:cNvSpPr txBox="1"/>
           <p:nvPr>
             <p:ph idx="6" type="body"/>
@@ -26161,7 +26326,7 @@
       </p:sp>
       <p:pic>
         <p:nvPicPr>
-          <p:cNvPr descr="q1_divmod.png" id="319" name="Google Shape;319;p40"/>
+          <p:cNvPr descr="q1_divmod.png" id="324" name="Google Shape;324;p41"/>
           <p:cNvPicPr preferRelativeResize="0"/>
           <p:nvPr/>
         </p:nvPicPr>
@@ -26194,12 +26359,12 @@
 </p:sld>
 </file>
 
-<file path=ppt/slides/slide23.xml><?xml version="1.0" encoding="utf-8"?>
+<file path=ppt/slides/slide24.xml><?xml version="1.0" encoding="utf-8"?>
 <p:sld xmlns:a="http://schemas.openxmlformats.org/drawingml/2006/main" xmlns:r="http://schemas.openxmlformats.org/officeDocument/2006/relationships" xmlns:mc="http://schemas.openxmlformats.org/markup-compatibility/2006" xmlns:mv="urn:schemas-microsoft-com:mac:vml" xmlns:p="http://schemas.openxmlformats.org/presentationml/2006/main" xmlns:c="http://schemas.openxmlformats.org/drawingml/2006/chart" xmlns:dgm="http://schemas.openxmlformats.org/drawingml/2006/diagram" xmlns:o="urn:schemas-microsoft-com:office:office" xmlns:v="urn:schemas-microsoft-com:vml" xmlns:pvml="urn:schemas-microsoft-com:office:powerpoint" xmlns:com="http://schemas.openxmlformats.org/drawingml/2006/compatibility" xmlns:p14="http://schemas.microsoft.com/office/powerpoint/2010/main" xmlns:p15="http://schemas.microsoft.com/office/powerpoint/2012/main" xmlns:ahyp="http://schemas.microsoft.com/office/drawing/2018/hyperlinkcolor">
   <p:cSld>
     <p:spTree>
       <p:nvGrpSpPr>
-        <p:cNvPr id="324" name="Shape 324"/>
+        <p:cNvPr id="329" name="Shape 329"/>
         <p:cNvGrpSpPr/>
         <p:nvPr/>
       </p:nvGrpSpPr>
@@ -26213,7 +26378,7 @@
       </p:grpSpPr>
       <p:sp>
         <p:nvSpPr>
-          <p:cNvPr id="325" name="Google Shape;325;p41"/>
+          <p:cNvPr id="330" name="Google Shape;330;p42"/>
           <p:cNvSpPr txBox="1"/>
           <p:nvPr>
             <p:ph idx="1" type="body"/>
@@ -26269,7 +26434,7 @@
       </p:sp>
       <p:sp>
         <p:nvSpPr>
-          <p:cNvPr id="326" name="Google Shape;326;p41"/>
+          <p:cNvPr id="331" name="Google Shape;331;p42"/>
           <p:cNvSpPr txBox="1"/>
           <p:nvPr>
             <p:ph type="title"/>
@@ -26326,7 +26491,7 @@
       </p:sp>
       <p:sp>
         <p:nvSpPr>
-          <p:cNvPr id="327" name="Google Shape;327;p41"/>
+          <p:cNvPr id="332" name="Google Shape;332;p42"/>
           <p:cNvSpPr txBox="1"/>
           <p:nvPr>
             <p:ph idx="3" type="body"/>
@@ -26382,7 +26547,7 @@
       </p:sp>
       <p:sp>
         <p:nvSpPr>
-          <p:cNvPr id="328" name="Google Shape;328;p41"/>
+          <p:cNvPr id="333" name="Google Shape;333;p42"/>
           <p:cNvSpPr txBox="1"/>
           <p:nvPr>
             <p:ph idx="4" type="body"/>
@@ -26578,7 +26743,7 @@
       </p:sp>
       <p:pic>
         <p:nvPicPr>
-          <p:cNvPr descr="ex2_string.png" id="329" name="Google Shape;329;p41"/>
+          <p:cNvPr descr="ex2_string.png" id="334" name="Google Shape;334;p42"/>
           <p:cNvPicPr preferRelativeResize="0"/>
           <p:nvPr/>
         </p:nvPicPr>
@@ -26605,7 +26770,7 @@
       </p:pic>
       <p:sp>
         <p:nvSpPr>
-          <p:cNvPr id="330" name="Google Shape;330;p41"/>
+          <p:cNvPr id="335" name="Google Shape;335;p42"/>
           <p:cNvSpPr/>
           <p:nvPr/>
         </p:nvSpPr>
@@ -26658,7 +26823,7 @@
       </p:sp>
       <p:sp>
         <p:nvSpPr>
-          <p:cNvPr id="331" name="Google Shape;331;p41"/>
+          <p:cNvPr id="336" name="Google Shape;336;p42"/>
           <p:cNvSpPr/>
           <p:nvPr/>
         </p:nvSpPr>
@@ -26709,7 +26874,7 @@
       </p:sp>
       <p:sp>
         <p:nvSpPr>
-          <p:cNvPr id="332" name="Google Shape;332;p41"/>
+          <p:cNvPr id="337" name="Google Shape;337;p42"/>
           <p:cNvSpPr txBox="1"/>
           <p:nvPr/>
         </p:nvSpPr>
@@ -26807,7 +26972,7 @@
       </p:sp>
       <p:sp>
         <p:nvSpPr>
-          <p:cNvPr id="333" name="Google Shape;333;p41"/>
+          <p:cNvPr id="338" name="Google Shape;338;p42"/>
           <p:cNvSpPr txBox="1"/>
           <p:nvPr/>
         </p:nvSpPr>
@@ -26944,7 +27109,7 @@
       </p:sp>
       <p:sp>
         <p:nvSpPr>
-          <p:cNvPr id="334" name="Google Shape;334;p41"/>
+          <p:cNvPr id="339" name="Google Shape;339;p42"/>
           <p:cNvSpPr txBox="1"/>
           <p:nvPr>
             <p:ph idx="1" type="body"/>
@@ -26998,12 +27163,12 @@
 </p:sld>
 </file>
 
-<file path=ppt/slides/slide24.xml><?xml version="1.0" encoding="utf-8"?>
+<file path=ppt/slides/slide25.xml><?xml version="1.0" encoding="utf-8"?>
 <p:sld xmlns:a="http://schemas.openxmlformats.org/drawingml/2006/main" xmlns:r="http://schemas.openxmlformats.org/officeDocument/2006/relationships" xmlns:mc="http://schemas.openxmlformats.org/markup-compatibility/2006" xmlns:mv="urn:schemas-microsoft-com:mac:vml" xmlns:p="http://schemas.openxmlformats.org/presentationml/2006/main" xmlns:c="http://schemas.openxmlformats.org/drawingml/2006/chart" xmlns:dgm="http://schemas.openxmlformats.org/drawingml/2006/diagram" xmlns:o="urn:schemas-microsoft-com:office:office" xmlns:v="urn:schemas-microsoft-com:vml" xmlns:pvml="urn:schemas-microsoft-com:office:powerpoint" xmlns:com="http://schemas.openxmlformats.org/drawingml/2006/compatibility" xmlns:p14="http://schemas.microsoft.com/office/powerpoint/2010/main" xmlns:p15="http://schemas.microsoft.com/office/powerpoint/2012/main" xmlns:ahyp="http://schemas.microsoft.com/office/drawing/2018/hyperlinkcolor">
   <p:cSld>
     <p:spTree>
       <p:nvGrpSpPr>
-        <p:cNvPr id="338" name="Shape 338"/>
+        <p:cNvPr id="343" name="Shape 343"/>
         <p:cNvGrpSpPr/>
         <p:nvPr/>
       </p:nvGrpSpPr>
@@ -27017,7 +27182,7 @@
       </p:grpSpPr>
       <p:sp>
         <p:nvSpPr>
-          <p:cNvPr id="339" name="Google Shape;339;p42"/>
+          <p:cNvPr id="344" name="Google Shape;344;p43"/>
           <p:cNvSpPr txBox="1"/>
           <p:nvPr>
             <p:ph type="title"/>
@@ -27074,7 +27239,7 @@
       </p:sp>
       <p:sp>
         <p:nvSpPr>
-          <p:cNvPr id="340" name="Google Shape;340;p42"/>
+          <p:cNvPr id="345" name="Google Shape;345;p43"/>
           <p:cNvSpPr txBox="1"/>
           <p:nvPr>
             <p:ph idx="1" type="body"/>
@@ -27118,7 +27283,7 @@
       </p:sp>
       <p:sp>
         <p:nvSpPr>
-          <p:cNvPr id="341" name="Google Shape;341;p42"/>
+          <p:cNvPr id="346" name="Google Shape;346;p43"/>
           <p:cNvSpPr txBox="1"/>
           <p:nvPr>
             <p:ph idx="2" type="body"/>
@@ -27171,12 +27336,12 @@
 </p:sld>
 </file>
 
-<file path=ppt/slides/slide25.xml><?xml version="1.0" encoding="utf-8"?>
+<file path=ppt/slides/slide26.xml><?xml version="1.0" encoding="utf-8"?>
 <p:sld xmlns:a="http://schemas.openxmlformats.org/drawingml/2006/main" xmlns:r="http://schemas.openxmlformats.org/officeDocument/2006/relationships" xmlns:mc="http://schemas.openxmlformats.org/markup-compatibility/2006" xmlns:mv="urn:schemas-microsoft-com:mac:vml" xmlns:p="http://schemas.openxmlformats.org/presentationml/2006/main" xmlns:c="http://schemas.openxmlformats.org/drawingml/2006/chart" xmlns:dgm="http://schemas.openxmlformats.org/drawingml/2006/diagram" xmlns:o="urn:schemas-microsoft-com:office:office" xmlns:v="urn:schemas-microsoft-com:vml" xmlns:pvml="urn:schemas-microsoft-com:office:powerpoint" xmlns:com="http://schemas.openxmlformats.org/drawingml/2006/compatibility" xmlns:p14="http://schemas.microsoft.com/office/powerpoint/2010/main" xmlns:p15="http://schemas.microsoft.com/office/powerpoint/2012/main" xmlns:ahyp="http://schemas.microsoft.com/office/drawing/2018/hyperlinkcolor">
   <p:cSld>
     <p:spTree>
       <p:nvGrpSpPr>
-        <p:cNvPr id="346" name="Shape 346"/>
+        <p:cNvPr id="351" name="Shape 351"/>
         <p:cNvGrpSpPr/>
         <p:nvPr/>
       </p:nvGrpSpPr>
@@ -27190,7 +27355,7 @@
       </p:grpSpPr>
       <p:sp>
         <p:nvSpPr>
-          <p:cNvPr id="347" name="Google Shape;347;p43"/>
+          <p:cNvPr id="352" name="Google Shape;352;p44"/>
           <p:cNvSpPr txBox="1"/>
           <p:nvPr>
             <p:ph idx="1" type="body"/>
@@ -27246,7 +27411,7 @@
       </p:sp>
       <p:sp>
         <p:nvSpPr>
-          <p:cNvPr id="348" name="Google Shape;348;p43"/>
+          <p:cNvPr id="353" name="Google Shape;353;p44"/>
           <p:cNvSpPr txBox="1"/>
           <p:nvPr>
             <p:ph type="title"/>
@@ -27303,7 +27468,7 @@
       </p:sp>
       <p:sp>
         <p:nvSpPr>
-          <p:cNvPr id="349" name="Google Shape;349;p43"/>
+          <p:cNvPr id="354" name="Google Shape;354;p44"/>
           <p:cNvSpPr txBox="1"/>
           <p:nvPr>
             <p:ph idx="3" type="body"/>
@@ -27359,7 +27524,7 @@
       </p:sp>
       <p:sp>
         <p:nvSpPr>
-          <p:cNvPr id="350" name="Google Shape;350;p43"/>
+          <p:cNvPr id="355" name="Google Shape;355;p44"/>
           <p:cNvSpPr txBox="1"/>
           <p:nvPr>
             <p:ph idx="4" type="body"/>
@@ -27543,7 +27708,7 @@
       </p:sp>
       <p:sp>
         <p:nvSpPr>
-          <p:cNvPr id="351" name="Google Shape;351;p43"/>
+          <p:cNvPr id="356" name="Google Shape;356;p44"/>
           <p:cNvSpPr/>
           <p:nvPr/>
         </p:nvSpPr>
@@ -27596,7 +27761,7 @@
       </p:sp>
       <p:sp>
         <p:nvSpPr>
-          <p:cNvPr id="352" name="Google Shape;352;p43"/>
+          <p:cNvPr id="357" name="Google Shape;357;p44"/>
           <p:cNvSpPr/>
           <p:nvPr/>
         </p:nvSpPr>
@@ -27647,7 +27812,7 @@
       </p:sp>
       <p:sp>
         <p:nvSpPr>
-          <p:cNvPr id="353" name="Google Shape;353;p43"/>
+          <p:cNvPr id="358" name="Google Shape;358;p44"/>
           <p:cNvSpPr txBox="1"/>
           <p:nvPr/>
         </p:nvSpPr>
@@ -27745,7 +27910,7 @@
       </p:sp>
       <p:pic>
         <p:nvPicPr>
-          <p:cNvPr descr="ex3_methods.png" id="354" name="Google Shape;354;p43"/>
+          <p:cNvPr descr="ex3_methods.png" id="359" name="Google Shape;359;p44"/>
           <p:cNvPicPr preferRelativeResize="0"/>
           <p:nvPr/>
         </p:nvPicPr>
@@ -27778,12 +27943,12 @@
 </p:sld>
 </file>
 
-<file path=ppt/slides/slide26.xml><?xml version="1.0" encoding="utf-8"?>
+<file path=ppt/slides/slide27.xml><?xml version="1.0" encoding="utf-8"?>
 <p:sld xmlns:a="http://schemas.openxmlformats.org/drawingml/2006/main" xmlns:r="http://schemas.openxmlformats.org/officeDocument/2006/relationships" xmlns:mc="http://schemas.openxmlformats.org/markup-compatibility/2006" xmlns:mv="urn:schemas-microsoft-com:mac:vml" xmlns:p="http://schemas.openxmlformats.org/presentationml/2006/main" xmlns:c="http://schemas.openxmlformats.org/drawingml/2006/chart" xmlns:dgm="http://schemas.openxmlformats.org/drawingml/2006/diagram" xmlns:o="urn:schemas-microsoft-com:office:office" xmlns:v="urn:schemas-microsoft-com:vml" xmlns:pvml="urn:schemas-microsoft-com:office:powerpoint" xmlns:com="http://schemas.openxmlformats.org/drawingml/2006/compatibility" xmlns:p14="http://schemas.microsoft.com/office/powerpoint/2010/main" xmlns:p15="http://schemas.microsoft.com/office/powerpoint/2012/main" xmlns:ahyp="http://schemas.microsoft.com/office/drawing/2018/hyperlinkcolor">
   <p:cSld>
     <p:spTree>
       <p:nvGrpSpPr>
-        <p:cNvPr id="359" name="Shape 359"/>
+        <p:cNvPr id="364" name="Shape 364"/>
         <p:cNvGrpSpPr/>
         <p:nvPr/>
       </p:nvGrpSpPr>
@@ -27797,7 +27962,7 @@
       </p:grpSpPr>
       <p:sp>
         <p:nvSpPr>
-          <p:cNvPr id="360" name="Google Shape;360;p44"/>
+          <p:cNvPr id="365" name="Google Shape;365;p45"/>
           <p:cNvSpPr txBox="1"/>
           <p:nvPr>
             <p:ph idx="1" type="body"/>
@@ -27853,7 +28018,7 @@
       </p:sp>
       <p:sp>
         <p:nvSpPr>
-          <p:cNvPr id="361" name="Google Shape;361;p44"/>
+          <p:cNvPr id="366" name="Google Shape;366;p45"/>
           <p:cNvSpPr txBox="1"/>
           <p:nvPr>
             <p:ph type="title"/>
@@ -27910,7 +28075,7 @@
       </p:sp>
       <p:sp>
         <p:nvSpPr>
-          <p:cNvPr id="362" name="Google Shape;362;p44"/>
+          <p:cNvPr id="367" name="Google Shape;367;p45"/>
           <p:cNvSpPr txBox="1"/>
           <p:nvPr>
             <p:ph idx="3" type="body"/>
@@ -27966,7 +28131,7 @@
       </p:sp>
       <p:sp>
         <p:nvSpPr>
-          <p:cNvPr id="363" name="Google Shape;363;p44"/>
+          <p:cNvPr id="368" name="Google Shape;368;p45"/>
           <p:cNvSpPr txBox="1"/>
           <p:nvPr>
             <p:ph idx="4" type="body"/>
@@ -28022,7 +28187,7 @@
       </p:sp>
       <p:sp>
         <p:nvSpPr>
-          <p:cNvPr id="364" name="Google Shape;364;p44"/>
+          <p:cNvPr id="369" name="Google Shape;369;p45"/>
           <p:cNvSpPr txBox="1"/>
           <p:nvPr>
             <p:ph idx="5" type="body"/>
@@ -28078,7 +28243,7 @@
       </p:sp>
       <p:sp>
         <p:nvSpPr>
-          <p:cNvPr id="365" name="Google Shape;365;p44"/>
+          <p:cNvPr id="370" name="Google Shape;370;p45"/>
           <p:cNvSpPr txBox="1"/>
           <p:nvPr>
             <p:ph idx="6" type="body"/>
@@ -28134,7 +28299,7 @@
       </p:sp>
       <p:pic>
         <p:nvPicPr>
-          <p:cNvPr descr="q2_chained.png" id="366" name="Google Shape;366;p44"/>
+          <p:cNvPr descr="q2_chained.png" id="371" name="Google Shape;371;p45"/>
           <p:cNvPicPr preferRelativeResize="0"/>
           <p:nvPr/>
         </p:nvPicPr>
@@ -28167,12 +28332,12 @@
 </p:sld>
 </file>
 
-<file path=ppt/slides/slide27.xml><?xml version="1.0" encoding="utf-8"?>
+<file path=ppt/slides/slide28.xml><?xml version="1.0" encoding="utf-8"?>
 <p:sld xmlns:a="http://schemas.openxmlformats.org/drawingml/2006/main" xmlns:r="http://schemas.openxmlformats.org/officeDocument/2006/relationships" xmlns:mc="http://schemas.openxmlformats.org/markup-compatibility/2006" xmlns:mv="urn:schemas-microsoft-com:mac:vml" xmlns:p="http://schemas.openxmlformats.org/presentationml/2006/main" xmlns:c="http://schemas.openxmlformats.org/drawingml/2006/chart" xmlns:dgm="http://schemas.openxmlformats.org/drawingml/2006/diagram" xmlns:o="urn:schemas-microsoft-com:office:office" xmlns:v="urn:schemas-microsoft-com:vml" xmlns:pvml="urn:schemas-microsoft-com:office:powerpoint" xmlns:com="http://schemas.openxmlformats.org/drawingml/2006/compatibility" xmlns:p14="http://schemas.microsoft.com/office/powerpoint/2010/main" xmlns:p15="http://schemas.microsoft.com/office/powerpoint/2012/main" xmlns:ahyp="http://schemas.microsoft.com/office/drawing/2018/hyperlinkcolor">
   <p:cSld>
     <p:spTree>
       <p:nvGrpSpPr>
-        <p:cNvPr id="370" name="Shape 370"/>
+        <p:cNvPr id="375" name="Shape 375"/>
         <p:cNvGrpSpPr/>
         <p:nvPr/>
       </p:nvGrpSpPr>
@@ -28186,7 +28351,7 @@
       </p:grpSpPr>
       <p:sp>
         <p:nvSpPr>
-          <p:cNvPr id="371" name="Google Shape;371;p45"/>
+          <p:cNvPr id="376" name="Google Shape;376;p46"/>
           <p:cNvSpPr txBox="1"/>
           <p:nvPr>
             <p:ph type="title"/>
@@ -28284,12 +28449,12 @@
 </p:sld>
 </file>
 
-<file path=ppt/slides/slide28.xml><?xml version="1.0" encoding="utf-8"?>
+<file path=ppt/slides/slide29.xml><?xml version="1.0" encoding="utf-8"?>
 <p:sld xmlns:a="http://schemas.openxmlformats.org/drawingml/2006/main" xmlns:r="http://schemas.openxmlformats.org/officeDocument/2006/relationships" xmlns:mc="http://schemas.openxmlformats.org/markup-compatibility/2006" xmlns:mv="urn:schemas-microsoft-com:mac:vml" xmlns:p="http://schemas.openxmlformats.org/presentationml/2006/main" xmlns:c="http://schemas.openxmlformats.org/drawingml/2006/chart" xmlns:dgm="http://schemas.openxmlformats.org/drawingml/2006/diagram" xmlns:o="urn:schemas-microsoft-com:office:office" xmlns:v="urn:schemas-microsoft-com:vml" xmlns:pvml="urn:schemas-microsoft-com:office:powerpoint" xmlns:com="http://schemas.openxmlformats.org/drawingml/2006/compatibility" xmlns:p14="http://schemas.microsoft.com/office/powerpoint/2010/main" xmlns:p15="http://schemas.microsoft.com/office/powerpoint/2012/main" xmlns:ahyp="http://schemas.microsoft.com/office/drawing/2018/hyperlinkcolor">
   <p:cSld>
     <p:spTree>
       <p:nvGrpSpPr>
-        <p:cNvPr id="376" name="Shape 376"/>
+        <p:cNvPr id="381" name="Shape 381"/>
         <p:cNvGrpSpPr/>
         <p:nvPr/>
       </p:nvGrpSpPr>
@@ -28303,7 +28468,7 @@
       </p:grpSpPr>
       <p:sp>
         <p:nvSpPr>
-          <p:cNvPr id="377" name="Google Shape;377;p46"/>
+          <p:cNvPr id="382" name="Google Shape;382;p47"/>
           <p:cNvSpPr txBox="1"/>
           <p:nvPr>
             <p:ph idx="1" type="body"/>
@@ -28359,7 +28524,7 @@
       </p:sp>
       <p:sp>
         <p:nvSpPr>
-          <p:cNvPr id="378" name="Google Shape;378;p46"/>
+          <p:cNvPr id="383" name="Google Shape;383;p47"/>
           <p:cNvSpPr txBox="1"/>
           <p:nvPr>
             <p:ph type="title"/>
@@ -28416,7 +28581,7 @@
       </p:sp>
       <p:sp>
         <p:nvSpPr>
-          <p:cNvPr id="379" name="Google Shape;379;p46"/>
+          <p:cNvPr id="384" name="Google Shape;384;p47"/>
           <p:cNvSpPr txBox="1"/>
           <p:nvPr>
             <p:ph idx="3" type="body"/>
@@ -28472,7 +28637,7 @@
       </p:sp>
       <p:sp>
         <p:nvSpPr>
-          <p:cNvPr id="380" name="Google Shape;380;p46"/>
+          <p:cNvPr id="385" name="Google Shape;385;p47"/>
           <p:cNvSpPr txBox="1"/>
           <p:nvPr>
             <p:ph idx="4" type="body"/>
@@ -28648,7 +28813,7 @@
       </p:sp>
       <p:pic>
         <p:nvPicPr>
-          <p:cNvPr descr="ex1.png" id="381" name="Google Shape;381;p46"/>
+          <p:cNvPr descr="ex1.png" id="386" name="Google Shape;386;p47"/>
           <p:cNvPicPr preferRelativeResize="0"/>
           <p:nvPr/>
         </p:nvPicPr>
@@ -28663,439 +28828,6 @@
           <a:xfrm>
             <a:off x="411480" y="1400401"/>
             <a:ext cx="4732020" cy="2376988"/>
-          </a:xfrm>
-          <a:prstGeom prst="rect">
-            <a:avLst/>
-          </a:prstGeom>
-          <a:noFill/>
-          <a:ln>
-            <a:noFill/>
-          </a:ln>
-        </p:spPr>
-      </p:pic>
-    </p:spTree>
-  </p:cSld>
-  <p:clrMapOvr>
-    <a:masterClrMapping/>
-  </p:clrMapOvr>
-</p:sld>
-</file>
-
-<file path=ppt/slides/slide29.xml><?xml version="1.0" encoding="utf-8"?>
-<p:sld xmlns:a="http://schemas.openxmlformats.org/drawingml/2006/main" xmlns:r="http://schemas.openxmlformats.org/officeDocument/2006/relationships" xmlns:mc="http://schemas.openxmlformats.org/markup-compatibility/2006" xmlns:mv="urn:schemas-microsoft-com:mac:vml" xmlns:p="http://schemas.openxmlformats.org/presentationml/2006/main" xmlns:c="http://schemas.openxmlformats.org/drawingml/2006/chart" xmlns:dgm="http://schemas.openxmlformats.org/drawingml/2006/diagram" xmlns:o="urn:schemas-microsoft-com:office:office" xmlns:v="urn:schemas-microsoft-com:vml" xmlns:pvml="urn:schemas-microsoft-com:office:powerpoint" xmlns:com="http://schemas.openxmlformats.org/drawingml/2006/compatibility" xmlns:p14="http://schemas.microsoft.com/office/powerpoint/2010/main" xmlns:p15="http://schemas.microsoft.com/office/powerpoint/2012/main" xmlns:ahyp="http://schemas.microsoft.com/office/drawing/2018/hyperlinkcolor">
-  <p:cSld>
-    <p:spTree>
-      <p:nvGrpSpPr>
-        <p:cNvPr id="386" name="Shape 386"/>
-        <p:cNvGrpSpPr/>
-        <p:nvPr/>
-      </p:nvGrpSpPr>
-      <p:grpSpPr>
-        <a:xfrm>
-          <a:off x="0" y="0"/>
-          <a:ext cx="0" cy="0"/>
-          <a:chOff x="0" y="0"/>
-          <a:chExt cx="0" cy="0"/>
-        </a:xfrm>
-      </p:grpSpPr>
-      <p:sp>
-        <p:nvSpPr>
-          <p:cNvPr id="387" name="Google Shape;387;p47"/>
-          <p:cNvSpPr txBox="1"/>
-          <p:nvPr>
-            <p:ph idx="1" type="body"/>
-          </p:nvPr>
-        </p:nvSpPr>
-        <p:spPr>
-          <a:xfrm>
-            <a:off x="411480" y="617220"/>
-            <a:ext cx="7543800" cy="205800"/>
-          </a:xfrm>
-          <a:prstGeom prst="rect">
-            <a:avLst/>
-          </a:prstGeom>
-          <a:noFill/>
-          <a:ln>
-            <a:noFill/>
-          </a:ln>
-        </p:spPr>
-        <p:txBody>
-          <a:bodyPr anchorCtr="0" anchor="t" bIns="34275" lIns="68575" spcFirstLastPara="1" rIns="68575" wrap="square" tIns="34275">
-            <a:normAutofit/>
-          </a:bodyPr>
-          <a:lstStyle/>
-          <a:p>
-            <a:pPr indent="0" lvl="0" marL="0" rtl="0" algn="l">
-              <a:spcBef>
-                <a:spcPts val="0"/>
-              </a:spcBef>
-              <a:spcAft>
-                <a:spcPts val="1200"/>
-              </a:spcAft>
-              <a:buClr>
-                <a:srgbClr val="D84568"/>
-              </a:buClr>
-              <a:buSzPts val="900"/>
-              <a:buNone/>
-            </a:pPr>
-            <a:r>
-              <a:rPr b="1" lang="en" sz="900">
-                <a:solidFill>
-                  <a:srgbClr val="D84568"/>
-                </a:solidFill>
-                <a:latin typeface="Roboto"/>
-                <a:ea typeface="Roboto"/>
-                <a:cs typeface="Roboto"/>
-                <a:sym typeface="Roboto"/>
-              </a:rPr>
-              <a:t>TRY IT YOURSELF · 4 MINUTES</a:t>
-            </a:r>
-            <a:endParaRPr sz="900"/>
-          </a:p>
-        </p:txBody>
-      </p:sp>
-      <p:sp>
-        <p:nvSpPr>
-          <p:cNvPr id="388" name="Google Shape;388;p47"/>
-          <p:cNvSpPr txBox="1"/>
-          <p:nvPr>
-            <p:ph type="title"/>
-          </p:nvPr>
-        </p:nvSpPr>
-        <p:spPr>
-          <a:xfrm>
-            <a:off x="411480" y="219456"/>
-            <a:ext cx="8298300" cy="356700"/>
-          </a:xfrm>
-          <a:prstGeom prst="rect">
-            <a:avLst/>
-          </a:prstGeom>
-          <a:noFill/>
-          <a:ln>
-            <a:noFill/>
-          </a:ln>
-        </p:spPr>
-        <p:txBody>
-          <a:bodyPr anchorCtr="0" anchor="t" bIns="34275" lIns="68575" spcFirstLastPara="1" rIns="68575" wrap="square" tIns="34275">
-            <a:normAutofit fontScale="90000"/>
-          </a:bodyPr>
-          <a:lstStyle/>
-          <a:p>
-            <a:pPr indent="0" lvl="0" marL="0" rtl="0" algn="l">
-              <a:spcBef>
-                <a:spcPts val="0"/>
-              </a:spcBef>
-              <a:spcAft>
-                <a:spcPts val="0"/>
-              </a:spcAft>
-              <a:buClr>
-                <a:srgbClr val="293480"/>
-              </a:buClr>
-              <a:buSzPct val="100000"/>
-              <a:buFont typeface="Roboto"/>
-              <a:buNone/>
-            </a:pPr>
-            <a:r>
-              <a:rPr b="1" lang="en" sz="2100">
-                <a:solidFill>
-                  <a:srgbClr val="293480"/>
-                </a:solidFill>
-                <a:latin typeface="Roboto"/>
-                <a:ea typeface="Roboto"/>
-                <a:cs typeface="Roboto"/>
-                <a:sym typeface="Roboto"/>
-              </a:rPr>
-              <a:t>Exercise 2 · Step Slicing</a:t>
-            </a:r>
-            <a:endParaRPr sz="2100"/>
-          </a:p>
-        </p:txBody>
-      </p:sp>
-      <p:sp>
-        <p:nvSpPr>
-          <p:cNvPr id="389" name="Google Shape;389;p47"/>
-          <p:cNvSpPr txBox="1"/>
-          <p:nvPr>
-            <p:ph idx="3" type="body"/>
-          </p:nvPr>
-        </p:nvSpPr>
-        <p:spPr>
-          <a:xfrm>
-            <a:off x="5417820" y="1062990"/>
-            <a:ext cx="3291900" cy="240000"/>
-          </a:xfrm>
-          <a:prstGeom prst="rect">
-            <a:avLst/>
-          </a:prstGeom>
-          <a:noFill/>
-          <a:ln>
-            <a:noFill/>
-          </a:ln>
-        </p:spPr>
-        <p:txBody>
-          <a:bodyPr anchorCtr="0" anchor="t" bIns="34275" lIns="68575" spcFirstLastPara="1" rIns="68575" wrap="square" tIns="34275">
-            <a:normAutofit fontScale="85000" lnSpcReduction="20000"/>
-          </a:bodyPr>
-          <a:lstStyle/>
-          <a:p>
-            <a:pPr indent="0" lvl="0" marL="0" rtl="0" algn="l">
-              <a:spcBef>
-                <a:spcPts val="0"/>
-              </a:spcBef>
-              <a:spcAft>
-                <a:spcPts val="1200"/>
-              </a:spcAft>
-              <a:buClr>
-                <a:srgbClr val="293480"/>
-              </a:buClr>
-              <a:buSzPct val="100000"/>
-              <a:buNone/>
-            </a:pPr>
-            <a:r>
-              <a:rPr b="1" lang="en" sz="1350">
-                <a:solidFill>
-                  <a:srgbClr val="293480"/>
-                </a:solidFill>
-                <a:latin typeface="Roboto"/>
-                <a:ea typeface="Roboto"/>
-                <a:cs typeface="Roboto"/>
-                <a:sym typeface="Roboto"/>
-              </a:rPr>
-              <a:t>Your task</a:t>
-            </a:r>
-            <a:endParaRPr sz="1350"/>
-          </a:p>
-        </p:txBody>
-      </p:sp>
-      <p:sp>
-        <p:nvSpPr>
-          <p:cNvPr id="390" name="Google Shape;390;p47"/>
-          <p:cNvSpPr txBox="1"/>
-          <p:nvPr>
-            <p:ph idx="4" type="body"/>
-          </p:nvPr>
-        </p:nvSpPr>
-        <p:spPr>
-          <a:xfrm>
-            <a:off x="5417820" y="1371600"/>
-            <a:ext cx="3291900" cy="1645800"/>
-          </a:xfrm>
-          <a:prstGeom prst="rect">
-            <a:avLst/>
-          </a:prstGeom>
-          <a:noFill/>
-          <a:ln>
-            <a:noFill/>
-          </a:ln>
-        </p:spPr>
-        <p:txBody>
-          <a:bodyPr anchorCtr="0" anchor="t" bIns="34275" lIns="68575" spcFirstLastPara="1" rIns="68575" wrap="square" tIns="34275">
-            <a:normAutofit/>
-          </a:bodyPr>
-          <a:lstStyle/>
-          <a:p>
-            <a:pPr indent="-257175" lvl="0" marL="257175" rtl="0" algn="l">
-              <a:lnSpc>
-                <a:spcPct val="100000"/>
-              </a:lnSpc>
-              <a:spcBef>
-                <a:spcPts val="0"/>
-              </a:spcBef>
-              <a:spcAft>
-                <a:spcPts val="0"/>
-              </a:spcAft>
-              <a:buSzPts val="1050"/>
-              <a:buChar char="•"/>
-            </a:pPr>
-            <a:r>
-              <a:rPr lang="en" sz="1200">
-                <a:solidFill>
-                  <a:srgbClr val="000000"/>
-                </a:solidFill>
-                <a:latin typeface="Calibri"/>
-                <a:ea typeface="Calibri"/>
-                <a:cs typeface="Calibri"/>
-                <a:sym typeface="Calibri"/>
-              </a:rPr>
-              <a:t>s = "abcdefghijklmnopqrstuvwxyz"</a:t>
-            </a:r>
-            <a:endParaRPr/>
-          </a:p>
-          <a:p>
-            <a:pPr indent="-257175" lvl="0" marL="257175" rtl="0" algn="l">
-              <a:spcBef>
-                <a:spcPts val="0"/>
-              </a:spcBef>
-              <a:spcAft>
-                <a:spcPts val="0"/>
-              </a:spcAft>
-              <a:buClr>
-                <a:srgbClr val="222540"/>
-              </a:buClr>
-              <a:buSzPts val="1050"/>
-              <a:buChar char="•"/>
-            </a:pPr>
-            <a:r>
-              <a:rPr lang="en" sz="1050">
-                <a:solidFill>
-                  <a:srgbClr val="222540"/>
-                </a:solidFill>
-                <a:latin typeface="Roboto"/>
-                <a:ea typeface="Roboto"/>
-                <a:cs typeface="Roboto"/>
-                <a:sym typeface="Roboto"/>
-              </a:rPr>
-              <a:t>Take </a:t>
-            </a:r>
-            <a:r>
-              <a:rPr lang="en" sz="1050">
-                <a:solidFill>
-                  <a:srgbClr val="D84568"/>
-                </a:solidFill>
-                <a:latin typeface="Roboto"/>
-                <a:ea typeface="Roboto"/>
-                <a:cs typeface="Roboto"/>
-                <a:sym typeface="Roboto"/>
-              </a:rPr>
-              <a:t>every 2nd character</a:t>
-            </a:r>
-            <a:r>
-              <a:rPr lang="en" sz="1050">
-                <a:solidFill>
-                  <a:srgbClr val="222540"/>
-                </a:solidFill>
-                <a:latin typeface="Roboto"/>
-                <a:ea typeface="Roboto"/>
-                <a:cs typeface="Roboto"/>
-                <a:sym typeface="Roboto"/>
-              </a:rPr>
-              <a:t> with a step slice.</a:t>
-            </a:r>
-            <a:endParaRPr sz="1050"/>
-          </a:p>
-          <a:p>
-            <a:pPr indent="-257175" lvl="0" marL="257175" rtl="0" algn="l">
-              <a:spcBef>
-                <a:spcPts val="810"/>
-              </a:spcBef>
-              <a:spcAft>
-                <a:spcPts val="0"/>
-              </a:spcAft>
-              <a:buClr>
-                <a:srgbClr val="222540"/>
-              </a:buClr>
-              <a:buSzPts val="1050"/>
-              <a:buChar char="•"/>
-            </a:pPr>
-            <a:r>
-              <a:rPr lang="en" sz="1050">
-                <a:solidFill>
-                  <a:srgbClr val="222540"/>
-                </a:solidFill>
-                <a:latin typeface="Roboto"/>
-                <a:ea typeface="Roboto"/>
-                <a:cs typeface="Roboto"/>
-                <a:sym typeface="Roboto"/>
-              </a:rPr>
-              <a:t>Reverse the string using </a:t>
-            </a:r>
-            <a:r>
-              <a:rPr lang="en" sz="1050">
-                <a:solidFill>
-                  <a:srgbClr val="D84568"/>
-                </a:solidFill>
-                <a:latin typeface="Roboto"/>
-                <a:ea typeface="Roboto"/>
-                <a:cs typeface="Roboto"/>
-                <a:sym typeface="Roboto"/>
-              </a:rPr>
-              <a:t>step -1</a:t>
-            </a:r>
-            <a:r>
-              <a:rPr lang="en" sz="1050">
-                <a:solidFill>
-                  <a:srgbClr val="222540"/>
-                </a:solidFill>
-                <a:latin typeface="Roboto"/>
-                <a:ea typeface="Roboto"/>
-                <a:cs typeface="Roboto"/>
-                <a:sym typeface="Roboto"/>
-              </a:rPr>
-              <a:t>.</a:t>
-            </a:r>
-            <a:endParaRPr sz="1050"/>
-          </a:p>
-          <a:p>
-            <a:pPr indent="-257175" lvl="0" marL="257175" rtl="0" algn="l">
-              <a:spcBef>
-                <a:spcPts val="810"/>
-              </a:spcBef>
-              <a:spcAft>
-                <a:spcPts val="0"/>
-              </a:spcAft>
-              <a:buClr>
-                <a:srgbClr val="222540"/>
-              </a:buClr>
-              <a:buSzPts val="1050"/>
-              <a:buChar char="•"/>
-            </a:pPr>
-            <a:r>
-              <a:rPr lang="en" sz="1050">
-                <a:solidFill>
-                  <a:srgbClr val="222540"/>
-                </a:solidFill>
-                <a:latin typeface="Roboto"/>
-                <a:ea typeface="Roboto"/>
-                <a:cs typeface="Roboto"/>
-                <a:sym typeface="Roboto"/>
-              </a:rPr>
-              <a:t>Combine a </a:t>
-            </a:r>
-            <a:r>
-              <a:rPr lang="en" sz="1050">
-                <a:solidFill>
-                  <a:srgbClr val="D84568"/>
-                </a:solidFill>
-                <a:latin typeface="Roboto"/>
-                <a:ea typeface="Roboto"/>
-                <a:cs typeface="Roboto"/>
-                <a:sym typeface="Roboto"/>
-              </a:rPr>
-              <a:t>start index and step 3</a:t>
-            </a:r>
-            <a:r>
-              <a:rPr lang="en" sz="1050">
-                <a:solidFill>
-                  <a:srgbClr val="222540"/>
-                </a:solidFill>
-                <a:latin typeface="Roboto"/>
-                <a:ea typeface="Roboto"/>
-                <a:cs typeface="Roboto"/>
-                <a:sym typeface="Roboto"/>
-              </a:rPr>
-              <a:t>.</a:t>
-            </a:r>
-            <a:endParaRPr sz="1050"/>
-          </a:p>
-        </p:txBody>
-      </p:sp>
-      <p:pic>
-        <p:nvPicPr>
-          <p:cNvPr descr="ex2.png" id="391" name="Google Shape;391;p47"/>
-          <p:cNvPicPr preferRelativeResize="0"/>
-          <p:nvPr/>
-        </p:nvPicPr>
-        <p:blipFill rotWithShape="1">
-          <a:blip r:embed="rId3">
-            <a:alphaModFix/>
-          </a:blip>
-          <a:srcRect b="0" l="0" r="0" t="0"/>
-          <a:stretch/>
-        </p:blipFill>
-        <p:spPr>
-          <a:xfrm>
-            <a:off x="411480" y="1327217"/>
-            <a:ext cx="4732019" cy="2523355"/>
           </a:xfrm>
           <a:prstGeom prst="rect">
             <a:avLst/>
@@ -29184,7 +28916,7 @@
   <p:cSld>
     <p:spTree>
       <p:nvGrpSpPr>
-        <p:cNvPr id="396" name="Shape 396"/>
+        <p:cNvPr id="391" name="Shape 391"/>
         <p:cNvGrpSpPr/>
         <p:nvPr/>
       </p:nvGrpSpPr>
@@ -29198,7 +28930,7 @@
       </p:grpSpPr>
       <p:sp>
         <p:nvSpPr>
-          <p:cNvPr id="397" name="Google Shape;397;p48"/>
+          <p:cNvPr id="392" name="Google Shape;392;p48"/>
           <p:cNvSpPr txBox="1"/>
           <p:nvPr>
             <p:ph idx="1" type="body"/>
@@ -29254,7 +28986,7 @@
       </p:sp>
       <p:sp>
         <p:nvSpPr>
-          <p:cNvPr id="398" name="Google Shape;398;p48"/>
+          <p:cNvPr id="393" name="Google Shape;393;p48"/>
           <p:cNvSpPr txBox="1"/>
           <p:nvPr>
             <p:ph type="title"/>
@@ -29303,7 +29035,7 @@
                 <a:cs typeface="Roboto"/>
                 <a:sym typeface="Roboto"/>
               </a:rPr>
-              <a:t>Exercise 3 · Negative Indices</a:t>
+              <a:t>Exercise 2 · Step Slicing</a:t>
             </a:r>
             <a:endParaRPr sz="2100"/>
           </a:p>
@@ -29311,7 +29043,7 @@
       </p:sp>
       <p:sp>
         <p:nvSpPr>
-          <p:cNvPr id="399" name="Google Shape;399;p48"/>
+          <p:cNvPr id="394" name="Google Shape;394;p48"/>
           <p:cNvSpPr txBox="1"/>
           <p:nvPr>
             <p:ph idx="3" type="body"/>
@@ -29367,7 +29099,7 @@
       </p:sp>
       <p:sp>
         <p:nvSpPr>
-          <p:cNvPr id="400" name="Google Shape;400;p48"/>
+          <p:cNvPr id="395" name="Google Shape;395;p48"/>
           <p:cNvSpPr txBox="1"/>
           <p:nvPr>
             <p:ph idx="4" type="body"/>
@@ -29393,6 +29125,439 @@
           <a:lstStyle/>
           <a:p>
             <a:pPr indent="-257175" lvl="0" marL="257175" rtl="0" algn="l">
+              <a:lnSpc>
+                <a:spcPct val="100000"/>
+              </a:lnSpc>
+              <a:spcBef>
+                <a:spcPts val="0"/>
+              </a:spcBef>
+              <a:spcAft>
+                <a:spcPts val="0"/>
+              </a:spcAft>
+              <a:buSzPts val="1050"/>
+              <a:buChar char="•"/>
+            </a:pPr>
+            <a:r>
+              <a:rPr lang="en" sz="1200">
+                <a:solidFill>
+                  <a:srgbClr val="000000"/>
+                </a:solidFill>
+                <a:latin typeface="Calibri"/>
+                <a:ea typeface="Calibri"/>
+                <a:cs typeface="Calibri"/>
+                <a:sym typeface="Calibri"/>
+              </a:rPr>
+              <a:t>s = "abcdefghijklmnopqrstuvwxyz"</a:t>
+            </a:r>
+            <a:endParaRPr/>
+          </a:p>
+          <a:p>
+            <a:pPr indent="-257175" lvl="0" marL="257175" rtl="0" algn="l">
+              <a:spcBef>
+                <a:spcPts val="0"/>
+              </a:spcBef>
+              <a:spcAft>
+                <a:spcPts val="0"/>
+              </a:spcAft>
+              <a:buClr>
+                <a:srgbClr val="222540"/>
+              </a:buClr>
+              <a:buSzPts val="1050"/>
+              <a:buChar char="•"/>
+            </a:pPr>
+            <a:r>
+              <a:rPr lang="en" sz="1050">
+                <a:solidFill>
+                  <a:srgbClr val="222540"/>
+                </a:solidFill>
+                <a:latin typeface="Roboto"/>
+                <a:ea typeface="Roboto"/>
+                <a:cs typeface="Roboto"/>
+                <a:sym typeface="Roboto"/>
+              </a:rPr>
+              <a:t>Take </a:t>
+            </a:r>
+            <a:r>
+              <a:rPr lang="en" sz="1050">
+                <a:solidFill>
+                  <a:srgbClr val="D84568"/>
+                </a:solidFill>
+                <a:latin typeface="Roboto"/>
+                <a:ea typeface="Roboto"/>
+                <a:cs typeface="Roboto"/>
+                <a:sym typeface="Roboto"/>
+              </a:rPr>
+              <a:t>every 2nd character</a:t>
+            </a:r>
+            <a:r>
+              <a:rPr lang="en" sz="1050">
+                <a:solidFill>
+                  <a:srgbClr val="222540"/>
+                </a:solidFill>
+                <a:latin typeface="Roboto"/>
+                <a:ea typeface="Roboto"/>
+                <a:cs typeface="Roboto"/>
+                <a:sym typeface="Roboto"/>
+              </a:rPr>
+              <a:t> with a step slice.</a:t>
+            </a:r>
+            <a:endParaRPr sz="1050"/>
+          </a:p>
+          <a:p>
+            <a:pPr indent="-257175" lvl="0" marL="257175" rtl="0" algn="l">
+              <a:spcBef>
+                <a:spcPts val="810"/>
+              </a:spcBef>
+              <a:spcAft>
+                <a:spcPts val="0"/>
+              </a:spcAft>
+              <a:buClr>
+                <a:srgbClr val="222540"/>
+              </a:buClr>
+              <a:buSzPts val="1050"/>
+              <a:buChar char="•"/>
+            </a:pPr>
+            <a:r>
+              <a:rPr lang="en" sz="1050">
+                <a:solidFill>
+                  <a:srgbClr val="222540"/>
+                </a:solidFill>
+                <a:latin typeface="Roboto"/>
+                <a:ea typeface="Roboto"/>
+                <a:cs typeface="Roboto"/>
+                <a:sym typeface="Roboto"/>
+              </a:rPr>
+              <a:t>Reverse the string using </a:t>
+            </a:r>
+            <a:r>
+              <a:rPr lang="en" sz="1050">
+                <a:solidFill>
+                  <a:srgbClr val="D84568"/>
+                </a:solidFill>
+                <a:latin typeface="Roboto"/>
+                <a:ea typeface="Roboto"/>
+                <a:cs typeface="Roboto"/>
+                <a:sym typeface="Roboto"/>
+              </a:rPr>
+              <a:t>step -1</a:t>
+            </a:r>
+            <a:r>
+              <a:rPr lang="en" sz="1050">
+                <a:solidFill>
+                  <a:srgbClr val="222540"/>
+                </a:solidFill>
+                <a:latin typeface="Roboto"/>
+                <a:ea typeface="Roboto"/>
+                <a:cs typeface="Roboto"/>
+                <a:sym typeface="Roboto"/>
+              </a:rPr>
+              <a:t>.</a:t>
+            </a:r>
+            <a:endParaRPr sz="1050"/>
+          </a:p>
+          <a:p>
+            <a:pPr indent="-257175" lvl="0" marL="257175" rtl="0" algn="l">
+              <a:spcBef>
+                <a:spcPts val="810"/>
+              </a:spcBef>
+              <a:spcAft>
+                <a:spcPts val="0"/>
+              </a:spcAft>
+              <a:buClr>
+                <a:srgbClr val="222540"/>
+              </a:buClr>
+              <a:buSzPts val="1050"/>
+              <a:buChar char="•"/>
+            </a:pPr>
+            <a:r>
+              <a:rPr lang="en" sz="1050">
+                <a:solidFill>
+                  <a:srgbClr val="222540"/>
+                </a:solidFill>
+                <a:latin typeface="Roboto"/>
+                <a:ea typeface="Roboto"/>
+                <a:cs typeface="Roboto"/>
+                <a:sym typeface="Roboto"/>
+              </a:rPr>
+              <a:t>Combine a </a:t>
+            </a:r>
+            <a:r>
+              <a:rPr lang="en" sz="1050">
+                <a:solidFill>
+                  <a:srgbClr val="D84568"/>
+                </a:solidFill>
+                <a:latin typeface="Roboto"/>
+                <a:ea typeface="Roboto"/>
+                <a:cs typeface="Roboto"/>
+                <a:sym typeface="Roboto"/>
+              </a:rPr>
+              <a:t>start index and step 3</a:t>
+            </a:r>
+            <a:r>
+              <a:rPr lang="en" sz="1050">
+                <a:solidFill>
+                  <a:srgbClr val="222540"/>
+                </a:solidFill>
+                <a:latin typeface="Roboto"/>
+                <a:ea typeface="Roboto"/>
+                <a:cs typeface="Roboto"/>
+                <a:sym typeface="Roboto"/>
+              </a:rPr>
+              <a:t>.</a:t>
+            </a:r>
+            <a:endParaRPr sz="1050"/>
+          </a:p>
+        </p:txBody>
+      </p:sp>
+      <p:pic>
+        <p:nvPicPr>
+          <p:cNvPr descr="ex2.png" id="396" name="Google Shape;396;p48"/>
+          <p:cNvPicPr preferRelativeResize="0"/>
+          <p:nvPr/>
+        </p:nvPicPr>
+        <p:blipFill rotWithShape="1">
+          <a:blip r:embed="rId3">
+            <a:alphaModFix/>
+          </a:blip>
+          <a:srcRect b="0" l="0" r="0" t="0"/>
+          <a:stretch/>
+        </p:blipFill>
+        <p:spPr>
+          <a:xfrm>
+            <a:off x="411480" y="1327217"/>
+            <a:ext cx="4732019" cy="2523355"/>
+          </a:xfrm>
+          <a:prstGeom prst="rect">
+            <a:avLst/>
+          </a:prstGeom>
+          <a:noFill/>
+          <a:ln>
+            <a:noFill/>
+          </a:ln>
+        </p:spPr>
+      </p:pic>
+    </p:spTree>
+  </p:cSld>
+  <p:clrMapOvr>
+    <a:masterClrMapping/>
+  </p:clrMapOvr>
+</p:sld>
+</file>
+
+<file path=ppt/slides/slide31.xml><?xml version="1.0" encoding="utf-8"?>
+<p:sld xmlns:a="http://schemas.openxmlformats.org/drawingml/2006/main" xmlns:r="http://schemas.openxmlformats.org/officeDocument/2006/relationships" xmlns:mc="http://schemas.openxmlformats.org/markup-compatibility/2006" xmlns:mv="urn:schemas-microsoft-com:mac:vml" xmlns:p="http://schemas.openxmlformats.org/presentationml/2006/main" xmlns:c="http://schemas.openxmlformats.org/drawingml/2006/chart" xmlns:dgm="http://schemas.openxmlformats.org/drawingml/2006/diagram" xmlns:o="urn:schemas-microsoft-com:office:office" xmlns:v="urn:schemas-microsoft-com:vml" xmlns:pvml="urn:schemas-microsoft-com:office:powerpoint" xmlns:com="http://schemas.openxmlformats.org/drawingml/2006/compatibility" xmlns:p14="http://schemas.microsoft.com/office/powerpoint/2010/main" xmlns:p15="http://schemas.microsoft.com/office/powerpoint/2012/main" xmlns:ahyp="http://schemas.microsoft.com/office/drawing/2018/hyperlinkcolor">
+  <p:cSld>
+    <p:spTree>
+      <p:nvGrpSpPr>
+        <p:cNvPr id="401" name="Shape 401"/>
+        <p:cNvGrpSpPr/>
+        <p:nvPr/>
+      </p:nvGrpSpPr>
+      <p:grpSpPr>
+        <a:xfrm>
+          <a:off x="0" y="0"/>
+          <a:ext cx="0" cy="0"/>
+          <a:chOff x="0" y="0"/>
+          <a:chExt cx="0" cy="0"/>
+        </a:xfrm>
+      </p:grpSpPr>
+      <p:sp>
+        <p:nvSpPr>
+          <p:cNvPr id="402" name="Google Shape;402;p49"/>
+          <p:cNvSpPr txBox="1"/>
+          <p:nvPr>
+            <p:ph idx="1" type="body"/>
+          </p:nvPr>
+        </p:nvSpPr>
+        <p:spPr>
+          <a:xfrm>
+            <a:off x="411480" y="617220"/>
+            <a:ext cx="7543800" cy="205800"/>
+          </a:xfrm>
+          <a:prstGeom prst="rect">
+            <a:avLst/>
+          </a:prstGeom>
+          <a:noFill/>
+          <a:ln>
+            <a:noFill/>
+          </a:ln>
+        </p:spPr>
+        <p:txBody>
+          <a:bodyPr anchorCtr="0" anchor="t" bIns="34275" lIns="68575" spcFirstLastPara="1" rIns="68575" wrap="square" tIns="34275">
+            <a:normAutofit/>
+          </a:bodyPr>
+          <a:lstStyle/>
+          <a:p>
+            <a:pPr indent="0" lvl="0" marL="0" rtl="0" algn="l">
+              <a:spcBef>
+                <a:spcPts val="0"/>
+              </a:spcBef>
+              <a:spcAft>
+                <a:spcPts val="1200"/>
+              </a:spcAft>
+              <a:buClr>
+                <a:srgbClr val="D84568"/>
+              </a:buClr>
+              <a:buSzPts val="900"/>
+              <a:buNone/>
+            </a:pPr>
+            <a:r>
+              <a:rPr b="1" lang="en" sz="900">
+                <a:solidFill>
+                  <a:srgbClr val="D84568"/>
+                </a:solidFill>
+                <a:latin typeface="Roboto"/>
+                <a:ea typeface="Roboto"/>
+                <a:cs typeface="Roboto"/>
+                <a:sym typeface="Roboto"/>
+              </a:rPr>
+              <a:t>TRY IT YOURSELF · 4 MINUTES</a:t>
+            </a:r>
+            <a:endParaRPr sz="900"/>
+          </a:p>
+        </p:txBody>
+      </p:sp>
+      <p:sp>
+        <p:nvSpPr>
+          <p:cNvPr id="403" name="Google Shape;403;p49"/>
+          <p:cNvSpPr txBox="1"/>
+          <p:nvPr>
+            <p:ph type="title"/>
+          </p:nvPr>
+        </p:nvSpPr>
+        <p:spPr>
+          <a:xfrm>
+            <a:off x="411480" y="219456"/>
+            <a:ext cx="8298300" cy="356700"/>
+          </a:xfrm>
+          <a:prstGeom prst="rect">
+            <a:avLst/>
+          </a:prstGeom>
+          <a:noFill/>
+          <a:ln>
+            <a:noFill/>
+          </a:ln>
+        </p:spPr>
+        <p:txBody>
+          <a:bodyPr anchorCtr="0" anchor="t" bIns="34275" lIns="68575" spcFirstLastPara="1" rIns="68575" wrap="square" tIns="34275">
+            <a:normAutofit fontScale="90000"/>
+          </a:bodyPr>
+          <a:lstStyle/>
+          <a:p>
+            <a:pPr indent="0" lvl="0" marL="0" rtl="0" algn="l">
+              <a:spcBef>
+                <a:spcPts val="0"/>
+              </a:spcBef>
+              <a:spcAft>
+                <a:spcPts val="0"/>
+              </a:spcAft>
+              <a:buClr>
+                <a:srgbClr val="293480"/>
+              </a:buClr>
+              <a:buSzPct val="100000"/>
+              <a:buFont typeface="Roboto"/>
+              <a:buNone/>
+            </a:pPr>
+            <a:r>
+              <a:rPr b="1" lang="en" sz="2100">
+                <a:solidFill>
+                  <a:srgbClr val="293480"/>
+                </a:solidFill>
+                <a:latin typeface="Roboto"/>
+                <a:ea typeface="Roboto"/>
+                <a:cs typeface="Roboto"/>
+                <a:sym typeface="Roboto"/>
+              </a:rPr>
+              <a:t>Exercise 3 · Negative Indices</a:t>
+            </a:r>
+            <a:endParaRPr sz="2100"/>
+          </a:p>
+        </p:txBody>
+      </p:sp>
+      <p:sp>
+        <p:nvSpPr>
+          <p:cNvPr id="404" name="Google Shape;404;p49"/>
+          <p:cNvSpPr txBox="1"/>
+          <p:nvPr>
+            <p:ph idx="3" type="body"/>
+          </p:nvPr>
+        </p:nvSpPr>
+        <p:spPr>
+          <a:xfrm>
+            <a:off x="5417820" y="1062990"/>
+            <a:ext cx="3291900" cy="240000"/>
+          </a:xfrm>
+          <a:prstGeom prst="rect">
+            <a:avLst/>
+          </a:prstGeom>
+          <a:noFill/>
+          <a:ln>
+            <a:noFill/>
+          </a:ln>
+        </p:spPr>
+        <p:txBody>
+          <a:bodyPr anchorCtr="0" anchor="t" bIns="34275" lIns="68575" spcFirstLastPara="1" rIns="68575" wrap="square" tIns="34275">
+            <a:normAutofit fontScale="85000" lnSpcReduction="20000"/>
+          </a:bodyPr>
+          <a:lstStyle/>
+          <a:p>
+            <a:pPr indent="0" lvl="0" marL="0" rtl="0" algn="l">
+              <a:spcBef>
+                <a:spcPts val="0"/>
+              </a:spcBef>
+              <a:spcAft>
+                <a:spcPts val="1200"/>
+              </a:spcAft>
+              <a:buClr>
+                <a:srgbClr val="293480"/>
+              </a:buClr>
+              <a:buSzPct val="100000"/>
+              <a:buNone/>
+            </a:pPr>
+            <a:r>
+              <a:rPr b="1" lang="en" sz="1350">
+                <a:solidFill>
+                  <a:srgbClr val="293480"/>
+                </a:solidFill>
+                <a:latin typeface="Roboto"/>
+                <a:ea typeface="Roboto"/>
+                <a:cs typeface="Roboto"/>
+                <a:sym typeface="Roboto"/>
+              </a:rPr>
+              <a:t>Your task</a:t>
+            </a:r>
+            <a:endParaRPr sz="1350"/>
+          </a:p>
+        </p:txBody>
+      </p:sp>
+      <p:sp>
+        <p:nvSpPr>
+          <p:cNvPr id="405" name="Google Shape;405;p49"/>
+          <p:cNvSpPr txBox="1"/>
+          <p:nvPr>
+            <p:ph idx="4" type="body"/>
+          </p:nvPr>
+        </p:nvSpPr>
+        <p:spPr>
+          <a:xfrm>
+            <a:off x="5417820" y="1371600"/>
+            <a:ext cx="3291900" cy="1645800"/>
+          </a:xfrm>
+          <a:prstGeom prst="rect">
+            <a:avLst/>
+          </a:prstGeom>
+          <a:noFill/>
+          <a:ln>
+            <a:noFill/>
+          </a:ln>
+        </p:spPr>
+        <p:txBody>
+          <a:bodyPr anchorCtr="0" anchor="t" bIns="34275" lIns="68575" spcFirstLastPara="1" rIns="68575" wrap="square" tIns="34275">
+            <a:normAutofit/>
+          </a:bodyPr>
+          <a:lstStyle/>
+          <a:p>
+            <a:pPr indent="-257175" lvl="0" marL="257175" rtl="0" algn="l">
               <a:spcBef>
                 <a:spcPts val="0"/>
               </a:spcBef>
@@ -29571,7 +29736,7 @@
       </p:sp>
       <p:pic>
         <p:nvPicPr>
-          <p:cNvPr descr="ex3.png" id="401" name="Google Shape;401;p48"/>
+          <p:cNvPr descr="ex3.png" id="406" name="Google Shape;406;p49"/>
           <p:cNvPicPr preferRelativeResize="0"/>
           <p:nvPr/>
         </p:nvPicPr>
@@ -29604,12 +29769,12 @@
 </p:sld>
 </file>
 
-<file path=ppt/slides/slide31.xml><?xml version="1.0" encoding="utf-8"?>
+<file path=ppt/slides/slide32.xml><?xml version="1.0" encoding="utf-8"?>
 <p:sld xmlns:a="http://schemas.openxmlformats.org/drawingml/2006/main" xmlns:r="http://schemas.openxmlformats.org/officeDocument/2006/relationships" xmlns:mc="http://schemas.openxmlformats.org/markup-compatibility/2006" xmlns:mv="urn:schemas-microsoft-com:mac:vml" xmlns:p="http://schemas.openxmlformats.org/presentationml/2006/main" xmlns:c="http://schemas.openxmlformats.org/drawingml/2006/chart" xmlns:dgm="http://schemas.openxmlformats.org/drawingml/2006/diagram" xmlns:o="urn:schemas-microsoft-com:office:office" xmlns:v="urn:schemas-microsoft-com:vml" xmlns:pvml="urn:schemas-microsoft-com:office:powerpoint" xmlns:com="http://schemas.openxmlformats.org/drawingml/2006/compatibility" xmlns:p14="http://schemas.microsoft.com/office/powerpoint/2010/main" xmlns:p15="http://schemas.microsoft.com/office/powerpoint/2012/main" xmlns:ahyp="http://schemas.microsoft.com/office/drawing/2018/hyperlinkcolor">
   <p:cSld>
     <p:spTree>
       <p:nvGrpSpPr>
-        <p:cNvPr id="406" name="Shape 406"/>
+        <p:cNvPr id="411" name="Shape 411"/>
         <p:cNvGrpSpPr/>
         <p:nvPr/>
       </p:nvGrpSpPr>
@@ -29623,7 +29788,7 @@
       </p:grpSpPr>
       <p:sp>
         <p:nvSpPr>
-          <p:cNvPr id="407" name="Google Shape;407;p49"/>
+          <p:cNvPr id="412" name="Google Shape;412;p50"/>
           <p:cNvSpPr txBox="1"/>
           <p:nvPr>
             <p:ph type="title"/>
@@ -29696,7 +29861,7 @@
       </p:sp>
       <p:sp>
         <p:nvSpPr>
-          <p:cNvPr id="408" name="Google Shape;408;p49"/>
+          <p:cNvPr id="413" name="Google Shape;413;p50"/>
           <p:cNvSpPr txBox="1"/>
           <p:nvPr>
             <p:ph idx="3" type="body"/>
@@ -29752,7 +29917,7 @@
       </p:sp>
       <p:sp>
         <p:nvSpPr>
-          <p:cNvPr id="409" name="Google Shape;409;p49"/>
+          <p:cNvPr id="414" name="Google Shape;414;p50"/>
           <p:cNvSpPr txBox="1"/>
           <p:nvPr>
             <p:ph idx="4" type="body"/>
@@ -29964,7 +30129,7 @@
       </p:sp>
       <p:pic>
         <p:nvPicPr>
-          <p:cNvPr descr="ex5.png" id="410" name="Google Shape;410;p49"/>
+          <p:cNvPr descr="ex5.png" id="415" name="Google Shape;415;p50"/>
           <p:cNvPicPr preferRelativeResize="0"/>
           <p:nvPr/>
         </p:nvPicPr>
@@ -29997,12 +30162,12 @@
 </p:sld>
 </file>
 
-<file path=ppt/slides/slide32.xml><?xml version="1.0" encoding="utf-8"?>
+<file path=ppt/slides/slide33.xml><?xml version="1.0" encoding="utf-8"?>
 <p:sld xmlns:a="http://schemas.openxmlformats.org/drawingml/2006/main" xmlns:r="http://schemas.openxmlformats.org/officeDocument/2006/relationships" xmlns:mc="http://schemas.openxmlformats.org/markup-compatibility/2006" xmlns:mv="urn:schemas-microsoft-com:mac:vml" xmlns:p="http://schemas.openxmlformats.org/presentationml/2006/main" xmlns:c="http://schemas.openxmlformats.org/drawingml/2006/chart" xmlns:dgm="http://schemas.openxmlformats.org/drawingml/2006/diagram" xmlns:o="urn:schemas-microsoft-com:office:office" xmlns:v="urn:schemas-microsoft-com:vml" xmlns:pvml="urn:schemas-microsoft-com:office:powerpoint" xmlns:com="http://schemas.openxmlformats.org/drawingml/2006/compatibility" xmlns:p14="http://schemas.microsoft.com/office/powerpoint/2010/main" xmlns:p15="http://schemas.microsoft.com/office/powerpoint/2012/main" xmlns:ahyp="http://schemas.microsoft.com/office/drawing/2018/hyperlinkcolor">
   <p:cSld>
     <p:spTree>
       <p:nvGrpSpPr>
-        <p:cNvPr id="414" name="Shape 414"/>
+        <p:cNvPr id="419" name="Shape 419"/>
         <p:cNvGrpSpPr/>
         <p:nvPr/>
       </p:nvGrpSpPr>
@@ -30016,7 +30181,7 @@
       </p:grpSpPr>
       <p:sp>
         <p:nvSpPr>
-          <p:cNvPr id="415" name="Google Shape;415;p50"/>
+          <p:cNvPr id="420" name="Google Shape;420;p51"/>
           <p:cNvSpPr txBox="1"/>
           <p:nvPr>
             <p:ph type="title"/>
@@ -30073,7 +30238,7 @@
       </p:sp>
       <p:sp>
         <p:nvSpPr>
-          <p:cNvPr id="416" name="Google Shape;416;p50"/>
+          <p:cNvPr id="421" name="Google Shape;421;p51"/>
           <p:cNvSpPr txBox="1"/>
           <p:nvPr>
             <p:ph idx="1" type="body"/>
@@ -30117,7 +30282,7 @@
       </p:sp>
       <p:sp>
         <p:nvSpPr>
-          <p:cNvPr id="417" name="Google Shape;417;p50"/>
+          <p:cNvPr id="422" name="Google Shape;422;p51"/>
           <p:cNvSpPr txBox="1"/>
           <p:nvPr>
             <p:ph idx="2" type="body"/>
@@ -30170,12 +30335,12 @@
 </p:sld>
 </file>
 
-<file path=ppt/slides/slide33.xml><?xml version="1.0" encoding="utf-8"?>
+<file path=ppt/slides/slide34.xml><?xml version="1.0" encoding="utf-8"?>
 <p:sld xmlns:a="http://schemas.openxmlformats.org/drawingml/2006/main" xmlns:r="http://schemas.openxmlformats.org/officeDocument/2006/relationships" xmlns:mc="http://schemas.openxmlformats.org/markup-compatibility/2006" xmlns:mv="urn:schemas-microsoft-com:mac:vml" xmlns:p="http://schemas.openxmlformats.org/presentationml/2006/main" xmlns:c="http://schemas.openxmlformats.org/drawingml/2006/chart" xmlns:dgm="http://schemas.openxmlformats.org/drawingml/2006/diagram" xmlns:o="urn:schemas-microsoft-com:office:office" xmlns:v="urn:schemas-microsoft-com:vml" xmlns:pvml="urn:schemas-microsoft-com:office:powerpoint" xmlns:com="http://schemas.openxmlformats.org/drawingml/2006/compatibility" xmlns:p14="http://schemas.microsoft.com/office/powerpoint/2010/main" xmlns:p15="http://schemas.microsoft.com/office/powerpoint/2012/main" xmlns:ahyp="http://schemas.microsoft.com/office/drawing/2018/hyperlinkcolor">
   <p:cSld>
     <p:spTree>
       <p:nvGrpSpPr>
-        <p:cNvPr id="422" name="Shape 422"/>
+        <p:cNvPr id="427" name="Shape 427"/>
         <p:cNvGrpSpPr/>
         <p:nvPr/>
       </p:nvGrpSpPr>
@@ -30189,7 +30354,7 @@
       </p:grpSpPr>
       <p:sp>
         <p:nvSpPr>
-          <p:cNvPr id="423" name="Google Shape;423;p51"/>
+          <p:cNvPr id="428" name="Google Shape;428;p52"/>
           <p:cNvSpPr txBox="1"/>
           <p:nvPr>
             <p:ph idx="1" type="body"/>
@@ -30245,7 +30410,7 @@
       </p:sp>
       <p:sp>
         <p:nvSpPr>
-          <p:cNvPr id="424" name="Google Shape;424;p51"/>
+          <p:cNvPr id="429" name="Google Shape;429;p52"/>
           <p:cNvSpPr txBox="1"/>
           <p:nvPr>
             <p:ph type="title"/>
@@ -30302,7 +30467,7 @@
       </p:sp>
       <p:sp>
         <p:nvSpPr>
-          <p:cNvPr id="425" name="Google Shape;425;p51"/>
+          <p:cNvPr id="430" name="Google Shape;430;p52"/>
           <p:cNvSpPr txBox="1"/>
           <p:nvPr>
             <p:ph idx="3" type="body"/>
@@ -30358,7 +30523,7 @@
       </p:sp>
       <p:sp>
         <p:nvSpPr>
-          <p:cNvPr id="426" name="Google Shape;426;p51"/>
+          <p:cNvPr id="431" name="Google Shape;431;p52"/>
           <p:cNvSpPr txBox="1"/>
           <p:nvPr>
             <p:ph idx="4" type="body"/>
@@ -30566,7 +30731,7 @@
       </p:sp>
       <p:pic>
         <p:nvPicPr>
-          <p:cNvPr id="427" name="Google Shape;427;p51"/>
+          <p:cNvPr id="432" name="Google Shape;432;p52"/>
           <p:cNvPicPr preferRelativeResize="0"/>
           <p:nvPr/>
         </p:nvPicPr>
@@ -30607,12 +30772,12 @@
 </p:sld>
 </file>
 
-<file path=ppt/slides/slide34.xml><?xml version="1.0" encoding="utf-8"?>
+<file path=ppt/slides/slide35.xml><?xml version="1.0" encoding="utf-8"?>
 <p:sld xmlns:a="http://schemas.openxmlformats.org/drawingml/2006/main" xmlns:r="http://schemas.openxmlformats.org/officeDocument/2006/relationships" xmlns:mc="http://schemas.openxmlformats.org/markup-compatibility/2006" xmlns:mv="urn:schemas-microsoft-com:mac:vml" xmlns:p="http://schemas.openxmlformats.org/presentationml/2006/main" xmlns:c="http://schemas.openxmlformats.org/drawingml/2006/chart" xmlns:dgm="http://schemas.openxmlformats.org/drawingml/2006/diagram" xmlns:o="urn:schemas-microsoft-com:office:office" xmlns:v="urn:schemas-microsoft-com:vml" xmlns:pvml="urn:schemas-microsoft-com:office:powerpoint" xmlns:com="http://schemas.openxmlformats.org/drawingml/2006/compatibility" xmlns:p14="http://schemas.microsoft.com/office/powerpoint/2010/main" xmlns:p15="http://schemas.microsoft.com/office/powerpoint/2012/main" xmlns:ahyp="http://schemas.microsoft.com/office/drawing/2018/hyperlinkcolor">
   <p:cSld>
     <p:spTree>
       <p:nvGrpSpPr>
-        <p:cNvPr id="432" name="Shape 432"/>
+        <p:cNvPr id="437" name="Shape 437"/>
         <p:cNvGrpSpPr/>
         <p:nvPr/>
       </p:nvGrpSpPr>
@@ -30626,7 +30791,7 @@
       </p:grpSpPr>
       <p:sp>
         <p:nvSpPr>
-          <p:cNvPr id="433" name="Google Shape;433;p52"/>
+          <p:cNvPr id="438" name="Google Shape;438;p53"/>
           <p:cNvSpPr txBox="1"/>
           <p:nvPr>
             <p:ph idx="1" type="body"/>
@@ -30682,7 +30847,7 @@
       </p:sp>
       <p:sp>
         <p:nvSpPr>
-          <p:cNvPr id="434" name="Google Shape;434;p52"/>
+          <p:cNvPr id="439" name="Google Shape;439;p53"/>
           <p:cNvSpPr txBox="1"/>
           <p:nvPr>
             <p:ph type="title"/>
@@ -30739,7 +30904,7 @@
       </p:sp>
       <p:sp>
         <p:nvSpPr>
-          <p:cNvPr id="435" name="Google Shape;435;p52"/>
+          <p:cNvPr id="440" name="Google Shape;440;p53"/>
           <p:cNvSpPr txBox="1"/>
           <p:nvPr>
             <p:ph idx="2" type="body"/>
@@ -30795,7 +30960,7 @@
       </p:sp>
       <p:sp>
         <p:nvSpPr>
-          <p:cNvPr id="436" name="Google Shape;436;p52"/>
+          <p:cNvPr id="441" name="Google Shape;441;p53"/>
           <p:cNvSpPr txBox="1"/>
           <p:nvPr>
             <p:ph idx="4" type="body"/>
@@ -30851,7 +31016,7 @@
       </p:sp>
       <p:sp>
         <p:nvSpPr>
-          <p:cNvPr id="437" name="Google Shape;437;p52"/>
+          <p:cNvPr id="442" name="Google Shape;442;p53"/>
           <p:cNvSpPr txBox="1"/>
           <p:nvPr>
             <p:ph idx="6" type="body"/>
@@ -30907,7 +31072,7 @@
       </p:sp>
       <p:sp>
         <p:nvSpPr>
-          <p:cNvPr id="438" name="Google Shape;438;p52"/>
+          <p:cNvPr id="443" name="Google Shape;443;p53"/>
           <p:cNvSpPr txBox="1"/>
           <p:nvPr>
             <p:ph idx="7" type="body"/>
@@ -30987,7 +31152,7 @@
       </p:sp>
       <p:pic>
         <p:nvPicPr>
-          <p:cNvPr descr="bug1_type.png" id="439" name="Google Shape;439;p52"/>
+          <p:cNvPr descr="bug1_type.png" id="444" name="Google Shape;444;p53"/>
           <p:cNvPicPr preferRelativeResize="0"/>
           <p:nvPr/>
         </p:nvPicPr>
@@ -31014,7 +31179,7 @@
       </p:pic>
       <p:pic>
         <p:nvPicPr>
-          <p:cNvPr descr="bug2_assign.png" id="440" name="Google Shape;440;p52"/>
+          <p:cNvPr descr="bug2_assign.png" id="445" name="Google Shape;445;p53"/>
           <p:cNvPicPr preferRelativeResize="0"/>
           <p:nvPr/>
         </p:nvPicPr>
@@ -31047,12 +31212,12 @@
 </p:sld>
 </file>
 
-<file path=ppt/slides/slide35.xml><?xml version="1.0" encoding="utf-8"?>
+<file path=ppt/slides/slide36.xml><?xml version="1.0" encoding="utf-8"?>
 <p:sld xmlns:a="http://schemas.openxmlformats.org/drawingml/2006/main" xmlns:r="http://schemas.openxmlformats.org/officeDocument/2006/relationships" xmlns:mc="http://schemas.openxmlformats.org/markup-compatibility/2006" xmlns:mv="urn:schemas-microsoft-com:mac:vml" xmlns:p="http://schemas.openxmlformats.org/presentationml/2006/main" xmlns:c="http://schemas.openxmlformats.org/drawingml/2006/chart" xmlns:dgm="http://schemas.openxmlformats.org/drawingml/2006/diagram" xmlns:o="urn:schemas-microsoft-com:office:office" xmlns:v="urn:schemas-microsoft-com:vml" xmlns:pvml="urn:schemas-microsoft-com:office:powerpoint" xmlns:com="http://schemas.openxmlformats.org/drawingml/2006/compatibility" xmlns:p14="http://schemas.microsoft.com/office/powerpoint/2010/main" xmlns:p15="http://schemas.microsoft.com/office/powerpoint/2012/main" xmlns:ahyp="http://schemas.microsoft.com/office/drawing/2018/hyperlinkcolor">
   <p:cSld>
     <p:spTree>
       <p:nvGrpSpPr>
-        <p:cNvPr id="445" name="Shape 445"/>
+        <p:cNvPr id="450" name="Shape 450"/>
         <p:cNvGrpSpPr/>
         <p:nvPr/>
       </p:nvGrpSpPr>
@@ -31066,7 +31231,7 @@
       </p:grpSpPr>
       <p:sp>
         <p:nvSpPr>
-          <p:cNvPr id="446" name="Google Shape;446;p53"/>
+          <p:cNvPr id="451" name="Google Shape;451;p54"/>
           <p:cNvSpPr txBox="1"/>
           <p:nvPr>
             <p:ph idx="1" type="body"/>
@@ -31122,7 +31287,7 @@
       </p:sp>
       <p:sp>
         <p:nvSpPr>
-          <p:cNvPr id="447" name="Google Shape;447;p53"/>
+          <p:cNvPr id="452" name="Google Shape;452;p54"/>
           <p:cNvSpPr txBox="1"/>
           <p:nvPr>
             <p:ph type="title"/>
@@ -31179,7 +31344,7 @@
       </p:sp>
       <p:sp>
         <p:nvSpPr>
-          <p:cNvPr id="448" name="Google Shape;448;p53"/>
+          <p:cNvPr id="453" name="Google Shape;453;p54"/>
           <p:cNvSpPr txBox="1"/>
           <p:nvPr>
             <p:ph idx="3" type="body"/>
@@ -31235,7 +31400,7 @@
       </p:sp>
       <p:sp>
         <p:nvSpPr>
-          <p:cNvPr id="449" name="Google Shape;449;p53"/>
+          <p:cNvPr id="454" name="Google Shape;454;p54"/>
           <p:cNvSpPr txBox="1"/>
           <p:nvPr>
             <p:ph idx="4" type="body"/>
@@ -31503,7 +31668,7 @@
       </p:sp>
       <p:pic>
         <p:nvPicPr>
-          <p:cNvPr descr="ex5_logic.png" id="450" name="Google Shape;450;p53"/>
+          <p:cNvPr descr="ex5_logic.png" id="455" name="Google Shape;455;p54"/>
           <p:cNvPicPr preferRelativeResize="0"/>
           <p:nvPr/>
         </p:nvPicPr>
@@ -31530,7 +31695,7 @@
       </p:pic>
       <p:sp>
         <p:nvSpPr>
-          <p:cNvPr id="451" name="Google Shape;451;p53"/>
+          <p:cNvPr id="456" name="Google Shape;456;p54"/>
           <p:cNvSpPr/>
           <p:nvPr/>
         </p:nvSpPr>
@@ -31583,7 +31748,7 @@
       </p:sp>
       <p:sp>
         <p:nvSpPr>
-          <p:cNvPr id="452" name="Google Shape;452;p53"/>
+          <p:cNvPr id="457" name="Google Shape;457;p54"/>
           <p:cNvSpPr/>
           <p:nvPr/>
         </p:nvSpPr>
@@ -31634,7 +31799,7 @@
       </p:sp>
       <p:sp>
         <p:nvSpPr>
-          <p:cNvPr id="453" name="Google Shape;453;p53"/>
+          <p:cNvPr id="458" name="Google Shape;458;p54"/>
           <p:cNvSpPr txBox="1"/>
           <p:nvPr/>
         </p:nvSpPr>
